--- a/Presentation_Template.pptx
+++ b/Presentation_Template.pptx
@@ -1890,7 +1890,7 @@
           </a:prstGeom>
           <a:extLst>
             <a:ext uri="{C572A759-6A51-4108-AA02-DFA0A04FC94B}">
-              <ma14:wrappingTextBoxFlag xmlns:ma14="http://schemas.microsoft.com/office/mac/drawingml/2011/main" xmlns="" val="0"/>
+              <ma14:wrappingTextBoxFlag xmlns="" xmlns:ma14="http://schemas.microsoft.com/office/mac/drawingml/2011/main" val="0"/>
             </a:ext>
           </a:extLst>
         </p:spPr>
@@ -1965,7 +1965,7 @@
           </a:prstGeom>
           <a:extLst>
             <a:ext uri="{C572A759-6A51-4108-AA02-DFA0A04FC94B}">
-              <ma14:wrappingTextBoxFlag xmlns:ma14="http://schemas.microsoft.com/office/mac/drawingml/2011/main" xmlns="" val="0"/>
+              <ma14:wrappingTextBoxFlag xmlns="" xmlns:ma14="http://schemas.microsoft.com/office/mac/drawingml/2011/main" val="0"/>
             </a:ext>
           </a:extLst>
         </p:spPr>
@@ -2700,8 +2700,8 @@
         </p:nvSpPr>
         <p:spPr>
           <a:xfrm>
-            <a:off x="777240" y="1600200"/>
-            <a:ext cx="10652760" cy="4251960"/>
+            <a:off x="408563" y="1600199"/>
+            <a:ext cx="11507820" cy="4499043"/>
           </a:xfrm>
           <a:prstGeom prst="roundRect">
             <a:avLst>
@@ -2721,42 +2721,6 @@
       </p:sp>
       <p:sp>
         <p:nvSpPr>
-          <p:cNvPr id="5" name="Text 3"/>
-          <p:cNvSpPr/>
-          <p:nvPr/>
-        </p:nvSpPr>
-        <p:spPr>
-          <a:xfrm>
-            <a:off x="1051560" y="1920240"/>
-            <a:ext cx="10058400" cy="3611880"/>
-          </a:xfrm>
-          <a:prstGeom prst="rect">
-            <a:avLst/>
-          </a:prstGeom>
-          <a:noFill/>
-          <a:ln/>
-        </p:spPr>
-        <p:txBody>
-          <a:bodyPr wrap="square" lIns="635" tIns="635" rIns="635" bIns="635" rtlCol="0" anchor="ctr"/>
-          <a:lstStyle/>
-          <a:p>
-            <a:pPr marL="0" indent="0" algn="ctr">
-              <a:buNone/>
-            </a:pPr>
-            <a:r>
-              <a:rPr lang="en-US" sz="1800" dirty="0">
-                <a:solidFill>
-                  <a:srgbClr val="667085"/>
-                </a:solidFill>
-              </a:rPr>
-              <a:t>Insert screenshots/logs showing one successful end-to-end run from ingestion to dashboard output.</a:t>
-            </a:r>
-            <a:endParaRPr lang="en-US" sz="1800" dirty="0"/>
-          </a:p>
-        </p:txBody>
-      </p:sp>
-      <p:sp>
-        <p:nvSpPr>
           <p:cNvPr id="25" name="Slide Number Placeholder 0"/>
           <p:cNvSpPr>
             <a:spLocks noGrp="1"/>
@@ -2775,7 +2739,7 @@
           </a:prstGeom>
           <a:extLst>
             <a:ext uri="{C572A759-6A51-4108-AA02-DFA0A04FC94B}">
-              <ma14:wrappingTextBoxFlag xmlns:ma14="http://schemas.microsoft.com/office/mac/drawingml/2011/main" xmlns="" val="0"/>
+              <ma14:wrappingTextBoxFlag xmlns="" xmlns:ma14="http://schemas.microsoft.com/office/mac/drawingml/2011/main" val="0"/>
             </a:ext>
           </a:extLst>
         </p:spPr>
@@ -2797,6 +2761,3013 @@
               <a:t>10</a:t>
             </a:fld>
             <a:endParaRPr lang="en-US"/>
+          </a:p>
+        </p:txBody>
+      </p:sp>
+      <p:sp>
+        <p:nvSpPr>
+          <p:cNvPr id="6" name="Shape 9">
+            <a:extLst>
+              <a:ext uri="{FF2B5EF4-FFF2-40B4-BE49-F238E27FC236}">
+                <a16:creationId xmlns:a16="http://schemas.microsoft.com/office/drawing/2014/main" id="{67DD3F14-7F69-6E1F-DAA5-83EA724C8B77}"/>
+              </a:ext>
+            </a:extLst>
+          </p:cNvPr>
+          <p:cNvSpPr/>
+          <p:nvPr/>
+        </p:nvSpPr>
+        <p:spPr>
+          <a:xfrm>
+            <a:off x="586740" y="2240280"/>
+            <a:ext cx="2514600" cy="960120"/>
+          </a:xfrm>
+          <a:prstGeom prst="roundRect">
+            <a:avLst>
+              <a:gd name="adj" fmla="val 6667"/>
+            </a:avLst>
+          </a:prstGeom>
+          <a:solidFill>
+            <a:srgbClr val="EEF2F7"/>
+          </a:solidFill>
+          <a:ln w="15875">
+            <a:solidFill>
+              <a:srgbClr val="17365D"/>
+            </a:solidFill>
+            <a:prstDash val="solid"/>
+          </a:ln>
+        </p:spPr>
+        <p:txBody>
+          <a:bodyPr/>
+          <a:lstStyle/>
+          <a:p>
+            <a:endParaRPr lang="en-IN"/>
+          </a:p>
+        </p:txBody>
+      </p:sp>
+      <p:sp>
+        <p:nvSpPr>
+          <p:cNvPr id="7" name="Text 10">
+            <a:extLst>
+              <a:ext uri="{FF2B5EF4-FFF2-40B4-BE49-F238E27FC236}">
+                <a16:creationId xmlns:a16="http://schemas.microsoft.com/office/drawing/2014/main" id="{E48A7C9D-6671-C528-73DF-5E549B2EA31F}"/>
+              </a:ext>
+            </a:extLst>
+          </p:cNvPr>
+          <p:cNvSpPr/>
+          <p:nvPr/>
+        </p:nvSpPr>
+        <p:spPr>
+          <a:xfrm>
+            <a:off x="586740" y="2350008"/>
+            <a:ext cx="2514600" cy="365760"/>
+          </a:xfrm>
+          <a:prstGeom prst="rect">
+            <a:avLst/>
+          </a:prstGeom>
+          <a:noFill/>
+          <a:ln/>
+        </p:spPr>
+        <p:txBody>
+          <a:bodyPr wrap="square" lIns="0" tIns="0" rIns="0" bIns="0" rtlCol="0" anchor="ctr"/>
+          <a:lstStyle>
+            <a:lvl1pPr marL="0" algn="l" defTabSz="914400" rtl="0" eaLnBrk="1" latinLnBrk="0" hangingPunct="1">
+              <a:defRPr sz="1800" kern="1200">
+                <a:solidFill>
+                  <a:schemeClr val="tx1"/>
+                </a:solidFill>
+                <a:latin typeface="+mn-lt"/>
+                <a:ea typeface="+mn-ea"/>
+                <a:cs typeface="+mn-cs"/>
+              </a:defRPr>
+            </a:lvl1pPr>
+            <a:lvl2pPr marL="457200" algn="l" defTabSz="914400" rtl="0" eaLnBrk="1" latinLnBrk="0" hangingPunct="1">
+              <a:defRPr sz="1800" kern="1200">
+                <a:solidFill>
+                  <a:schemeClr val="tx1"/>
+                </a:solidFill>
+                <a:latin typeface="+mn-lt"/>
+                <a:ea typeface="+mn-ea"/>
+                <a:cs typeface="+mn-cs"/>
+              </a:defRPr>
+            </a:lvl2pPr>
+            <a:lvl3pPr marL="914400" algn="l" defTabSz="914400" rtl="0" eaLnBrk="1" latinLnBrk="0" hangingPunct="1">
+              <a:defRPr sz="1800" kern="1200">
+                <a:solidFill>
+                  <a:schemeClr val="tx1"/>
+                </a:solidFill>
+                <a:latin typeface="+mn-lt"/>
+                <a:ea typeface="+mn-ea"/>
+                <a:cs typeface="+mn-cs"/>
+              </a:defRPr>
+            </a:lvl3pPr>
+            <a:lvl4pPr marL="1371600" algn="l" defTabSz="914400" rtl="0" eaLnBrk="1" latinLnBrk="0" hangingPunct="1">
+              <a:defRPr sz="1800" kern="1200">
+                <a:solidFill>
+                  <a:schemeClr val="tx1"/>
+                </a:solidFill>
+                <a:latin typeface="+mn-lt"/>
+                <a:ea typeface="+mn-ea"/>
+                <a:cs typeface="+mn-cs"/>
+              </a:defRPr>
+            </a:lvl4pPr>
+            <a:lvl5pPr marL="1828800" algn="l" defTabSz="914400" rtl="0" eaLnBrk="1" latinLnBrk="0" hangingPunct="1">
+              <a:defRPr sz="1800" kern="1200">
+                <a:solidFill>
+                  <a:schemeClr val="tx1"/>
+                </a:solidFill>
+                <a:latin typeface="+mn-lt"/>
+                <a:ea typeface="+mn-ea"/>
+                <a:cs typeface="+mn-cs"/>
+              </a:defRPr>
+            </a:lvl5pPr>
+            <a:lvl6pPr marL="2286000" algn="l" defTabSz="914400" rtl="0" eaLnBrk="1" latinLnBrk="0" hangingPunct="1">
+              <a:defRPr sz="1800" kern="1200">
+                <a:solidFill>
+                  <a:schemeClr val="tx1"/>
+                </a:solidFill>
+                <a:latin typeface="+mn-lt"/>
+                <a:ea typeface="+mn-ea"/>
+                <a:cs typeface="+mn-cs"/>
+              </a:defRPr>
+            </a:lvl6pPr>
+            <a:lvl7pPr marL="2743200" algn="l" defTabSz="914400" rtl="0" eaLnBrk="1" latinLnBrk="0" hangingPunct="1">
+              <a:defRPr sz="1800" kern="1200">
+                <a:solidFill>
+                  <a:schemeClr val="tx1"/>
+                </a:solidFill>
+                <a:latin typeface="+mn-lt"/>
+                <a:ea typeface="+mn-ea"/>
+                <a:cs typeface="+mn-cs"/>
+              </a:defRPr>
+            </a:lvl7pPr>
+            <a:lvl8pPr marL="3200400" algn="l" defTabSz="914400" rtl="0" eaLnBrk="1" latinLnBrk="0" hangingPunct="1">
+              <a:defRPr sz="1800" kern="1200">
+                <a:solidFill>
+                  <a:schemeClr val="tx1"/>
+                </a:solidFill>
+                <a:latin typeface="+mn-lt"/>
+                <a:ea typeface="+mn-ea"/>
+                <a:cs typeface="+mn-cs"/>
+              </a:defRPr>
+            </a:lvl8pPr>
+            <a:lvl9pPr marL="3657600" algn="l" defTabSz="914400" rtl="0" eaLnBrk="1" latinLnBrk="0" hangingPunct="1">
+              <a:defRPr sz="1800" kern="1200">
+                <a:solidFill>
+                  <a:schemeClr val="tx1"/>
+                </a:solidFill>
+                <a:latin typeface="+mn-lt"/>
+                <a:ea typeface="+mn-ea"/>
+                <a:cs typeface="+mn-cs"/>
+              </a:defRPr>
+            </a:lvl9pPr>
+          </a:lstStyle>
+          <a:p>
+            <a:pPr algn="ctr"/>
+            <a:r>
+              <a:rPr lang="en-US" sz="1000" b="1" dirty="0" err="1">
+                <a:solidFill>
+                  <a:srgbClr val="17365D"/>
+                </a:solidFill>
+                <a:latin typeface="Courier New" pitchFamily="34" charset="0"/>
+                <a:ea typeface="Courier New" pitchFamily="34" charset="-122"/>
+                <a:cs typeface="Courier New" pitchFamily="34" charset="-120"/>
+              </a:rPr>
+              <a:t>load_raw_to_staging</a:t>
+            </a:r>
+            <a:endParaRPr lang="en-US" sz="1000" dirty="0"/>
+          </a:p>
+        </p:txBody>
+      </p:sp>
+      <p:sp>
+        <p:nvSpPr>
+          <p:cNvPr id="8" name="Shape 11">
+            <a:extLst>
+              <a:ext uri="{FF2B5EF4-FFF2-40B4-BE49-F238E27FC236}">
+                <a16:creationId xmlns:a16="http://schemas.microsoft.com/office/drawing/2014/main" id="{ACE2F4A0-B197-44B0-F196-75ADB4D0A53C}"/>
+              </a:ext>
+            </a:extLst>
+          </p:cNvPr>
+          <p:cNvSpPr/>
+          <p:nvPr/>
+        </p:nvSpPr>
+        <p:spPr>
+          <a:xfrm>
+            <a:off x="1341120" y="2770632"/>
+            <a:ext cx="1005840" cy="274320"/>
+          </a:xfrm>
+          <a:prstGeom prst="roundRect">
+            <a:avLst>
+              <a:gd name="adj" fmla="val 50000"/>
+            </a:avLst>
+          </a:prstGeom>
+          <a:solidFill>
+            <a:srgbClr val="17365D"/>
+          </a:solidFill>
+          <a:ln/>
+        </p:spPr>
+        <p:txBody>
+          <a:bodyPr/>
+          <a:lstStyle/>
+          <a:p>
+            <a:endParaRPr lang="en-IN"/>
+          </a:p>
+        </p:txBody>
+      </p:sp>
+      <p:sp>
+        <p:nvSpPr>
+          <p:cNvPr id="9" name="Text 12">
+            <a:extLst>
+              <a:ext uri="{FF2B5EF4-FFF2-40B4-BE49-F238E27FC236}">
+                <a16:creationId xmlns:a16="http://schemas.microsoft.com/office/drawing/2014/main" id="{CA150591-6B50-9D30-B6F2-BEAD0F5C7409}"/>
+              </a:ext>
+            </a:extLst>
+          </p:cNvPr>
+          <p:cNvSpPr/>
+          <p:nvPr/>
+        </p:nvSpPr>
+        <p:spPr>
+          <a:xfrm>
+            <a:off x="1341120" y="2770632"/>
+            <a:ext cx="1005840" cy="274320"/>
+          </a:xfrm>
+          <a:prstGeom prst="rect">
+            <a:avLst/>
+          </a:prstGeom>
+          <a:noFill/>
+          <a:ln/>
+        </p:spPr>
+        <p:txBody>
+          <a:bodyPr wrap="square" lIns="0" tIns="0" rIns="0" bIns="0" rtlCol="0" anchor="ctr"/>
+          <a:lstStyle>
+            <a:lvl1pPr marL="0" algn="l" defTabSz="914400" rtl="0" eaLnBrk="1" latinLnBrk="0" hangingPunct="1">
+              <a:defRPr sz="1800" kern="1200">
+                <a:solidFill>
+                  <a:schemeClr val="tx1"/>
+                </a:solidFill>
+                <a:latin typeface="+mn-lt"/>
+                <a:ea typeface="+mn-ea"/>
+                <a:cs typeface="+mn-cs"/>
+              </a:defRPr>
+            </a:lvl1pPr>
+            <a:lvl2pPr marL="457200" algn="l" defTabSz="914400" rtl="0" eaLnBrk="1" latinLnBrk="0" hangingPunct="1">
+              <a:defRPr sz="1800" kern="1200">
+                <a:solidFill>
+                  <a:schemeClr val="tx1"/>
+                </a:solidFill>
+                <a:latin typeface="+mn-lt"/>
+                <a:ea typeface="+mn-ea"/>
+                <a:cs typeface="+mn-cs"/>
+              </a:defRPr>
+            </a:lvl2pPr>
+            <a:lvl3pPr marL="914400" algn="l" defTabSz="914400" rtl="0" eaLnBrk="1" latinLnBrk="0" hangingPunct="1">
+              <a:defRPr sz="1800" kern="1200">
+                <a:solidFill>
+                  <a:schemeClr val="tx1"/>
+                </a:solidFill>
+                <a:latin typeface="+mn-lt"/>
+                <a:ea typeface="+mn-ea"/>
+                <a:cs typeface="+mn-cs"/>
+              </a:defRPr>
+            </a:lvl3pPr>
+            <a:lvl4pPr marL="1371600" algn="l" defTabSz="914400" rtl="0" eaLnBrk="1" latinLnBrk="0" hangingPunct="1">
+              <a:defRPr sz="1800" kern="1200">
+                <a:solidFill>
+                  <a:schemeClr val="tx1"/>
+                </a:solidFill>
+                <a:latin typeface="+mn-lt"/>
+                <a:ea typeface="+mn-ea"/>
+                <a:cs typeface="+mn-cs"/>
+              </a:defRPr>
+            </a:lvl4pPr>
+            <a:lvl5pPr marL="1828800" algn="l" defTabSz="914400" rtl="0" eaLnBrk="1" latinLnBrk="0" hangingPunct="1">
+              <a:defRPr sz="1800" kern="1200">
+                <a:solidFill>
+                  <a:schemeClr val="tx1"/>
+                </a:solidFill>
+                <a:latin typeface="+mn-lt"/>
+                <a:ea typeface="+mn-ea"/>
+                <a:cs typeface="+mn-cs"/>
+              </a:defRPr>
+            </a:lvl5pPr>
+            <a:lvl6pPr marL="2286000" algn="l" defTabSz="914400" rtl="0" eaLnBrk="1" latinLnBrk="0" hangingPunct="1">
+              <a:defRPr sz="1800" kern="1200">
+                <a:solidFill>
+                  <a:schemeClr val="tx1"/>
+                </a:solidFill>
+                <a:latin typeface="+mn-lt"/>
+                <a:ea typeface="+mn-ea"/>
+                <a:cs typeface="+mn-cs"/>
+              </a:defRPr>
+            </a:lvl6pPr>
+            <a:lvl7pPr marL="2743200" algn="l" defTabSz="914400" rtl="0" eaLnBrk="1" latinLnBrk="0" hangingPunct="1">
+              <a:defRPr sz="1800" kern="1200">
+                <a:solidFill>
+                  <a:schemeClr val="tx1"/>
+                </a:solidFill>
+                <a:latin typeface="+mn-lt"/>
+                <a:ea typeface="+mn-ea"/>
+                <a:cs typeface="+mn-cs"/>
+              </a:defRPr>
+            </a:lvl7pPr>
+            <a:lvl8pPr marL="3200400" algn="l" defTabSz="914400" rtl="0" eaLnBrk="1" latinLnBrk="0" hangingPunct="1">
+              <a:defRPr sz="1800" kern="1200">
+                <a:solidFill>
+                  <a:schemeClr val="tx1"/>
+                </a:solidFill>
+                <a:latin typeface="+mn-lt"/>
+                <a:ea typeface="+mn-ea"/>
+                <a:cs typeface="+mn-cs"/>
+              </a:defRPr>
+            </a:lvl8pPr>
+            <a:lvl9pPr marL="3657600" algn="l" defTabSz="914400" rtl="0" eaLnBrk="1" latinLnBrk="0" hangingPunct="1">
+              <a:defRPr sz="1800" kern="1200">
+                <a:solidFill>
+                  <a:schemeClr val="tx1"/>
+                </a:solidFill>
+                <a:latin typeface="+mn-lt"/>
+                <a:ea typeface="+mn-ea"/>
+                <a:cs typeface="+mn-cs"/>
+              </a:defRPr>
+            </a:lvl9pPr>
+          </a:lstStyle>
+          <a:p>
+            <a:pPr marL="0" indent="0" algn="ctr">
+              <a:buNone/>
+            </a:pPr>
+            <a:r>
+              <a:rPr lang="en-US" sz="950" b="1" dirty="0">
+                <a:solidFill>
+                  <a:srgbClr val="FFFFFF"/>
+                </a:solidFill>
+                <a:latin typeface="Arial" pitchFamily="34" charset="0"/>
+                <a:ea typeface="Arial" pitchFamily="34" charset="-122"/>
+                <a:cs typeface="Arial" pitchFamily="34" charset="-120"/>
+              </a:rPr>
+              <a:t>✓ SUCCESS</a:t>
+            </a:r>
+            <a:endParaRPr lang="en-US" sz="950" dirty="0"/>
+          </a:p>
+        </p:txBody>
+      </p:sp>
+      <p:sp>
+        <p:nvSpPr>
+          <p:cNvPr id="10" name="Shape 13">
+            <a:extLst>
+              <a:ext uri="{FF2B5EF4-FFF2-40B4-BE49-F238E27FC236}">
+                <a16:creationId xmlns:a16="http://schemas.microsoft.com/office/drawing/2014/main" id="{38DF5F2F-F65E-E798-6BBF-2E472420B06A}"/>
+              </a:ext>
+            </a:extLst>
+          </p:cNvPr>
+          <p:cNvSpPr/>
+          <p:nvPr/>
+        </p:nvSpPr>
+        <p:spPr>
+          <a:xfrm>
+            <a:off x="3101340" y="2720340"/>
+            <a:ext cx="320040" cy="0"/>
+          </a:xfrm>
+          <a:prstGeom prst="line">
+            <a:avLst/>
+          </a:prstGeom>
+          <a:noFill/>
+          <a:ln w="22225">
+            <a:solidFill>
+              <a:srgbClr val="F28C28"/>
+            </a:solidFill>
+            <a:prstDash val="solid"/>
+            <a:tailEnd type="triangle"/>
+          </a:ln>
+        </p:spPr>
+        <p:txBody>
+          <a:bodyPr/>
+          <a:lstStyle/>
+          <a:p>
+            <a:endParaRPr lang="en-IN"/>
+          </a:p>
+        </p:txBody>
+      </p:sp>
+      <p:sp>
+        <p:nvSpPr>
+          <p:cNvPr id="11" name="Shape 14">
+            <a:extLst>
+              <a:ext uri="{FF2B5EF4-FFF2-40B4-BE49-F238E27FC236}">
+                <a16:creationId xmlns:a16="http://schemas.microsoft.com/office/drawing/2014/main" id="{6EAAF3B3-00B6-B617-A7C6-F585C796BBBF}"/>
+              </a:ext>
+            </a:extLst>
+          </p:cNvPr>
+          <p:cNvSpPr/>
+          <p:nvPr/>
+        </p:nvSpPr>
+        <p:spPr>
+          <a:xfrm>
+            <a:off x="3421380" y="2240280"/>
+            <a:ext cx="2514600" cy="960120"/>
+          </a:xfrm>
+          <a:prstGeom prst="roundRect">
+            <a:avLst>
+              <a:gd name="adj" fmla="val 6667"/>
+            </a:avLst>
+          </a:prstGeom>
+          <a:solidFill>
+            <a:srgbClr val="EEF2F7"/>
+          </a:solidFill>
+          <a:ln w="15875">
+            <a:solidFill>
+              <a:srgbClr val="17365D"/>
+            </a:solidFill>
+            <a:prstDash val="solid"/>
+          </a:ln>
+        </p:spPr>
+        <p:txBody>
+          <a:bodyPr/>
+          <a:lstStyle/>
+          <a:p>
+            <a:endParaRPr lang="en-IN"/>
+          </a:p>
+        </p:txBody>
+      </p:sp>
+      <p:sp>
+        <p:nvSpPr>
+          <p:cNvPr id="12" name="Text 15">
+            <a:extLst>
+              <a:ext uri="{FF2B5EF4-FFF2-40B4-BE49-F238E27FC236}">
+                <a16:creationId xmlns:a16="http://schemas.microsoft.com/office/drawing/2014/main" id="{20130F59-5D6D-09B5-5C77-534BD62226BF}"/>
+              </a:ext>
+            </a:extLst>
+          </p:cNvPr>
+          <p:cNvSpPr/>
+          <p:nvPr/>
+        </p:nvSpPr>
+        <p:spPr>
+          <a:xfrm>
+            <a:off x="3421380" y="2350008"/>
+            <a:ext cx="2514600" cy="365760"/>
+          </a:xfrm>
+          <a:prstGeom prst="rect">
+            <a:avLst/>
+          </a:prstGeom>
+          <a:noFill/>
+          <a:ln/>
+        </p:spPr>
+        <p:txBody>
+          <a:bodyPr wrap="square" lIns="0" tIns="0" rIns="0" bIns="0" rtlCol="0" anchor="ctr"/>
+          <a:lstStyle>
+            <a:lvl1pPr marL="0" algn="l" defTabSz="914400" rtl="0" eaLnBrk="1" latinLnBrk="0" hangingPunct="1">
+              <a:defRPr sz="1800" kern="1200">
+                <a:solidFill>
+                  <a:schemeClr val="tx1"/>
+                </a:solidFill>
+                <a:latin typeface="+mn-lt"/>
+                <a:ea typeface="+mn-ea"/>
+                <a:cs typeface="+mn-cs"/>
+              </a:defRPr>
+            </a:lvl1pPr>
+            <a:lvl2pPr marL="457200" algn="l" defTabSz="914400" rtl="0" eaLnBrk="1" latinLnBrk="0" hangingPunct="1">
+              <a:defRPr sz="1800" kern="1200">
+                <a:solidFill>
+                  <a:schemeClr val="tx1"/>
+                </a:solidFill>
+                <a:latin typeface="+mn-lt"/>
+                <a:ea typeface="+mn-ea"/>
+                <a:cs typeface="+mn-cs"/>
+              </a:defRPr>
+            </a:lvl2pPr>
+            <a:lvl3pPr marL="914400" algn="l" defTabSz="914400" rtl="0" eaLnBrk="1" latinLnBrk="0" hangingPunct="1">
+              <a:defRPr sz="1800" kern="1200">
+                <a:solidFill>
+                  <a:schemeClr val="tx1"/>
+                </a:solidFill>
+                <a:latin typeface="+mn-lt"/>
+                <a:ea typeface="+mn-ea"/>
+                <a:cs typeface="+mn-cs"/>
+              </a:defRPr>
+            </a:lvl3pPr>
+            <a:lvl4pPr marL="1371600" algn="l" defTabSz="914400" rtl="0" eaLnBrk="1" latinLnBrk="0" hangingPunct="1">
+              <a:defRPr sz="1800" kern="1200">
+                <a:solidFill>
+                  <a:schemeClr val="tx1"/>
+                </a:solidFill>
+                <a:latin typeface="+mn-lt"/>
+                <a:ea typeface="+mn-ea"/>
+                <a:cs typeface="+mn-cs"/>
+              </a:defRPr>
+            </a:lvl4pPr>
+            <a:lvl5pPr marL="1828800" algn="l" defTabSz="914400" rtl="0" eaLnBrk="1" latinLnBrk="0" hangingPunct="1">
+              <a:defRPr sz="1800" kern="1200">
+                <a:solidFill>
+                  <a:schemeClr val="tx1"/>
+                </a:solidFill>
+                <a:latin typeface="+mn-lt"/>
+                <a:ea typeface="+mn-ea"/>
+                <a:cs typeface="+mn-cs"/>
+              </a:defRPr>
+            </a:lvl5pPr>
+            <a:lvl6pPr marL="2286000" algn="l" defTabSz="914400" rtl="0" eaLnBrk="1" latinLnBrk="0" hangingPunct="1">
+              <a:defRPr sz="1800" kern="1200">
+                <a:solidFill>
+                  <a:schemeClr val="tx1"/>
+                </a:solidFill>
+                <a:latin typeface="+mn-lt"/>
+                <a:ea typeface="+mn-ea"/>
+                <a:cs typeface="+mn-cs"/>
+              </a:defRPr>
+            </a:lvl6pPr>
+            <a:lvl7pPr marL="2743200" algn="l" defTabSz="914400" rtl="0" eaLnBrk="1" latinLnBrk="0" hangingPunct="1">
+              <a:defRPr sz="1800" kern="1200">
+                <a:solidFill>
+                  <a:schemeClr val="tx1"/>
+                </a:solidFill>
+                <a:latin typeface="+mn-lt"/>
+                <a:ea typeface="+mn-ea"/>
+                <a:cs typeface="+mn-cs"/>
+              </a:defRPr>
+            </a:lvl7pPr>
+            <a:lvl8pPr marL="3200400" algn="l" defTabSz="914400" rtl="0" eaLnBrk="1" latinLnBrk="0" hangingPunct="1">
+              <a:defRPr sz="1800" kern="1200">
+                <a:solidFill>
+                  <a:schemeClr val="tx1"/>
+                </a:solidFill>
+                <a:latin typeface="+mn-lt"/>
+                <a:ea typeface="+mn-ea"/>
+                <a:cs typeface="+mn-cs"/>
+              </a:defRPr>
+            </a:lvl8pPr>
+            <a:lvl9pPr marL="3657600" algn="l" defTabSz="914400" rtl="0" eaLnBrk="1" latinLnBrk="0" hangingPunct="1">
+              <a:defRPr sz="1800" kern="1200">
+                <a:solidFill>
+                  <a:schemeClr val="tx1"/>
+                </a:solidFill>
+                <a:latin typeface="+mn-lt"/>
+                <a:ea typeface="+mn-ea"/>
+                <a:cs typeface="+mn-cs"/>
+              </a:defRPr>
+            </a:lvl9pPr>
+          </a:lstStyle>
+          <a:p>
+            <a:pPr algn="ctr"/>
+            <a:r>
+              <a:rPr lang="en-US" sz="1150" b="1" dirty="0" err="1">
+                <a:solidFill>
+                  <a:srgbClr val="17365D"/>
+                </a:solidFill>
+                <a:latin typeface="Courier New" pitchFamily="34" charset="0"/>
+                <a:ea typeface="Courier New" pitchFamily="34" charset="-122"/>
+                <a:cs typeface="Courier New" pitchFamily="34" charset="-120"/>
+              </a:rPr>
+              <a:t>validate_and_clean</a:t>
+            </a:r>
+            <a:endParaRPr lang="en-US" sz="1150" dirty="0"/>
+          </a:p>
+        </p:txBody>
+      </p:sp>
+      <p:sp>
+        <p:nvSpPr>
+          <p:cNvPr id="13" name="Shape 16">
+            <a:extLst>
+              <a:ext uri="{FF2B5EF4-FFF2-40B4-BE49-F238E27FC236}">
+                <a16:creationId xmlns:a16="http://schemas.microsoft.com/office/drawing/2014/main" id="{7895127D-9304-E2A9-1107-BB334BCF6AAA}"/>
+              </a:ext>
+            </a:extLst>
+          </p:cNvPr>
+          <p:cNvSpPr/>
+          <p:nvPr/>
+        </p:nvSpPr>
+        <p:spPr>
+          <a:xfrm>
+            <a:off x="4175760" y="2770632"/>
+            <a:ext cx="1005840" cy="274320"/>
+          </a:xfrm>
+          <a:prstGeom prst="roundRect">
+            <a:avLst>
+              <a:gd name="adj" fmla="val 50000"/>
+            </a:avLst>
+          </a:prstGeom>
+          <a:solidFill>
+            <a:srgbClr val="17365D"/>
+          </a:solidFill>
+          <a:ln/>
+        </p:spPr>
+        <p:txBody>
+          <a:bodyPr/>
+          <a:lstStyle/>
+          <a:p>
+            <a:endParaRPr lang="en-IN"/>
+          </a:p>
+        </p:txBody>
+      </p:sp>
+      <p:sp>
+        <p:nvSpPr>
+          <p:cNvPr id="14" name="Text 17">
+            <a:extLst>
+              <a:ext uri="{FF2B5EF4-FFF2-40B4-BE49-F238E27FC236}">
+                <a16:creationId xmlns:a16="http://schemas.microsoft.com/office/drawing/2014/main" id="{66755564-F444-514D-692A-AF35DFC83C7A}"/>
+              </a:ext>
+            </a:extLst>
+          </p:cNvPr>
+          <p:cNvSpPr/>
+          <p:nvPr/>
+        </p:nvSpPr>
+        <p:spPr>
+          <a:xfrm>
+            <a:off x="4175760" y="2770632"/>
+            <a:ext cx="1005840" cy="274320"/>
+          </a:xfrm>
+          <a:prstGeom prst="rect">
+            <a:avLst/>
+          </a:prstGeom>
+          <a:noFill/>
+          <a:ln/>
+        </p:spPr>
+        <p:txBody>
+          <a:bodyPr wrap="square" lIns="0" tIns="0" rIns="0" bIns="0" rtlCol="0" anchor="ctr"/>
+          <a:lstStyle>
+            <a:lvl1pPr marL="0" algn="l" defTabSz="914400" rtl="0" eaLnBrk="1" latinLnBrk="0" hangingPunct="1">
+              <a:defRPr sz="1800" kern="1200">
+                <a:solidFill>
+                  <a:schemeClr val="tx1"/>
+                </a:solidFill>
+                <a:latin typeface="+mn-lt"/>
+                <a:ea typeface="+mn-ea"/>
+                <a:cs typeface="+mn-cs"/>
+              </a:defRPr>
+            </a:lvl1pPr>
+            <a:lvl2pPr marL="457200" algn="l" defTabSz="914400" rtl="0" eaLnBrk="1" latinLnBrk="0" hangingPunct="1">
+              <a:defRPr sz="1800" kern="1200">
+                <a:solidFill>
+                  <a:schemeClr val="tx1"/>
+                </a:solidFill>
+                <a:latin typeface="+mn-lt"/>
+                <a:ea typeface="+mn-ea"/>
+                <a:cs typeface="+mn-cs"/>
+              </a:defRPr>
+            </a:lvl2pPr>
+            <a:lvl3pPr marL="914400" algn="l" defTabSz="914400" rtl="0" eaLnBrk="1" latinLnBrk="0" hangingPunct="1">
+              <a:defRPr sz="1800" kern="1200">
+                <a:solidFill>
+                  <a:schemeClr val="tx1"/>
+                </a:solidFill>
+                <a:latin typeface="+mn-lt"/>
+                <a:ea typeface="+mn-ea"/>
+                <a:cs typeface="+mn-cs"/>
+              </a:defRPr>
+            </a:lvl3pPr>
+            <a:lvl4pPr marL="1371600" algn="l" defTabSz="914400" rtl="0" eaLnBrk="1" latinLnBrk="0" hangingPunct="1">
+              <a:defRPr sz="1800" kern="1200">
+                <a:solidFill>
+                  <a:schemeClr val="tx1"/>
+                </a:solidFill>
+                <a:latin typeface="+mn-lt"/>
+                <a:ea typeface="+mn-ea"/>
+                <a:cs typeface="+mn-cs"/>
+              </a:defRPr>
+            </a:lvl4pPr>
+            <a:lvl5pPr marL="1828800" algn="l" defTabSz="914400" rtl="0" eaLnBrk="1" latinLnBrk="0" hangingPunct="1">
+              <a:defRPr sz="1800" kern="1200">
+                <a:solidFill>
+                  <a:schemeClr val="tx1"/>
+                </a:solidFill>
+                <a:latin typeface="+mn-lt"/>
+                <a:ea typeface="+mn-ea"/>
+                <a:cs typeface="+mn-cs"/>
+              </a:defRPr>
+            </a:lvl5pPr>
+            <a:lvl6pPr marL="2286000" algn="l" defTabSz="914400" rtl="0" eaLnBrk="1" latinLnBrk="0" hangingPunct="1">
+              <a:defRPr sz="1800" kern="1200">
+                <a:solidFill>
+                  <a:schemeClr val="tx1"/>
+                </a:solidFill>
+                <a:latin typeface="+mn-lt"/>
+                <a:ea typeface="+mn-ea"/>
+                <a:cs typeface="+mn-cs"/>
+              </a:defRPr>
+            </a:lvl6pPr>
+            <a:lvl7pPr marL="2743200" algn="l" defTabSz="914400" rtl="0" eaLnBrk="1" latinLnBrk="0" hangingPunct="1">
+              <a:defRPr sz="1800" kern="1200">
+                <a:solidFill>
+                  <a:schemeClr val="tx1"/>
+                </a:solidFill>
+                <a:latin typeface="+mn-lt"/>
+                <a:ea typeface="+mn-ea"/>
+                <a:cs typeface="+mn-cs"/>
+              </a:defRPr>
+            </a:lvl7pPr>
+            <a:lvl8pPr marL="3200400" algn="l" defTabSz="914400" rtl="0" eaLnBrk="1" latinLnBrk="0" hangingPunct="1">
+              <a:defRPr sz="1800" kern="1200">
+                <a:solidFill>
+                  <a:schemeClr val="tx1"/>
+                </a:solidFill>
+                <a:latin typeface="+mn-lt"/>
+                <a:ea typeface="+mn-ea"/>
+                <a:cs typeface="+mn-cs"/>
+              </a:defRPr>
+            </a:lvl8pPr>
+            <a:lvl9pPr marL="3657600" algn="l" defTabSz="914400" rtl="0" eaLnBrk="1" latinLnBrk="0" hangingPunct="1">
+              <a:defRPr sz="1800" kern="1200">
+                <a:solidFill>
+                  <a:schemeClr val="tx1"/>
+                </a:solidFill>
+                <a:latin typeface="+mn-lt"/>
+                <a:ea typeface="+mn-ea"/>
+                <a:cs typeface="+mn-cs"/>
+              </a:defRPr>
+            </a:lvl9pPr>
+          </a:lstStyle>
+          <a:p>
+            <a:pPr marL="0" indent="0" algn="ctr">
+              <a:buNone/>
+            </a:pPr>
+            <a:r>
+              <a:rPr lang="en-US" sz="950" b="1" dirty="0">
+                <a:solidFill>
+                  <a:srgbClr val="FFFFFF"/>
+                </a:solidFill>
+                <a:latin typeface="Arial" pitchFamily="34" charset="0"/>
+                <a:ea typeface="Arial" pitchFamily="34" charset="-122"/>
+                <a:cs typeface="Arial" pitchFamily="34" charset="-120"/>
+              </a:rPr>
+              <a:t>✓ SUCCESS</a:t>
+            </a:r>
+            <a:endParaRPr lang="en-US" sz="950" dirty="0"/>
+          </a:p>
+        </p:txBody>
+      </p:sp>
+      <p:sp>
+        <p:nvSpPr>
+          <p:cNvPr id="15" name="Shape 18">
+            <a:extLst>
+              <a:ext uri="{FF2B5EF4-FFF2-40B4-BE49-F238E27FC236}">
+                <a16:creationId xmlns:a16="http://schemas.microsoft.com/office/drawing/2014/main" id="{D65EAC92-CE90-0080-397D-7AE2E3A496CC}"/>
+              </a:ext>
+            </a:extLst>
+          </p:cNvPr>
+          <p:cNvSpPr/>
+          <p:nvPr/>
+        </p:nvSpPr>
+        <p:spPr>
+          <a:xfrm>
+            <a:off x="5935980" y="2720340"/>
+            <a:ext cx="320040" cy="0"/>
+          </a:xfrm>
+          <a:prstGeom prst="line">
+            <a:avLst/>
+          </a:prstGeom>
+          <a:noFill/>
+          <a:ln w="22225">
+            <a:solidFill>
+              <a:srgbClr val="F28C28"/>
+            </a:solidFill>
+            <a:prstDash val="solid"/>
+            <a:tailEnd type="triangle"/>
+          </a:ln>
+        </p:spPr>
+        <p:txBody>
+          <a:bodyPr/>
+          <a:lstStyle/>
+          <a:p>
+            <a:endParaRPr lang="en-IN"/>
+          </a:p>
+        </p:txBody>
+      </p:sp>
+      <p:sp>
+        <p:nvSpPr>
+          <p:cNvPr id="16" name="Shape 19">
+            <a:extLst>
+              <a:ext uri="{FF2B5EF4-FFF2-40B4-BE49-F238E27FC236}">
+                <a16:creationId xmlns:a16="http://schemas.microsoft.com/office/drawing/2014/main" id="{9B154D56-30AF-464E-1D71-897648927A30}"/>
+              </a:ext>
+            </a:extLst>
+          </p:cNvPr>
+          <p:cNvSpPr/>
+          <p:nvPr/>
+        </p:nvSpPr>
+        <p:spPr>
+          <a:xfrm>
+            <a:off x="6256020" y="2240280"/>
+            <a:ext cx="2514600" cy="960120"/>
+          </a:xfrm>
+          <a:prstGeom prst="roundRect">
+            <a:avLst>
+              <a:gd name="adj" fmla="val 6667"/>
+            </a:avLst>
+          </a:prstGeom>
+          <a:solidFill>
+            <a:srgbClr val="EEF2F7"/>
+          </a:solidFill>
+          <a:ln w="15875">
+            <a:solidFill>
+              <a:srgbClr val="17365D"/>
+            </a:solidFill>
+            <a:prstDash val="solid"/>
+          </a:ln>
+        </p:spPr>
+        <p:txBody>
+          <a:bodyPr/>
+          <a:lstStyle/>
+          <a:p>
+            <a:endParaRPr lang="en-IN"/>
+          </a:p>
+        </p:txBody>
+      </p:sp>
+      <p:sp>
+        <p:nvSpPr>
+          <p:cNvPr id="17" name="Text 20">
+            <a:extLst>
+              <a:ext uri="{FF2B5EF4-FFF2-40B4-BE49-F238E27FC236}">
+                <a16:creationId xmlns:a16="http://schemas.microsoft.com/office/drawing/2014/main" id="{24A7BEF4-B7A6-3883-1F50-7179BD5742A6}"/>
+              </a:ext>
+            </a:extLst>
+          </p:cNvPr>
+          <p:cNvSpPr/>
+          <p:nvPr/>
+        </p:nvSpPr>
+        <p:spPr>
+          <a:xfrm>
+            <a:off x="6256020" y="2350008"/>
+            <a:ext cx="2514600" cy="365760"/>
+          </a:xfrm>
+          <a:prstGeom prst="rect">
+            <a:avLst/>
+          </a:prstGeom>
+          <a:noFill/>
+          <a:ln/>
+        </p:spPr>
+        <p:txBody>
+          <a:bodyPr wrap="square" lIns="0" tIns="0" rIns="0" bIns="0" rtlCol="0" anchor="ctr"/>
+          <a:lstStyle>
+            <a:lvl1pPr marL="0" algn="l" defTabSz="914400" rtl="0" eaLnBrk="1" latinLnBrk="0" hangingPunct="1">
+              <a:defRPr sz="1800" kern="1200">
+                <a:solidFill>
+                  <a:schemeClr val="tx1"/>
+                </a:solidFill>
+                <a:latin typeface="+mn-lt"/>
+                <a:ea typeface="+mn-ea"/>
+                <a:cs typeface="+mn-cs"/>
+              </a:defRPr>
+            </a:lvl1pPr>
+            <a:lvl2pPr marL="457200" algn="l" defTabSz="914400" rtl="0" eaLnBrk="1" latinLnBrk="0" hangingPunct="1">
+              <a:defRPr sz="1800" kern="1200">
+                <a:solidFill>
+                  <a:schemeClr val="tx1"/>
+                </a:solidFill>
+                <a:latin typeface="+mn-lt"/>
+                <a:ea typeface="+mn-ea"/>
+                <a:cs typeface="+mn-cs"/>
+              </a:defRPr>
+            </a:lvl2pPr>
+            <a:lvl3pPr marL="914400" algn="l" defTabSz="914400" rtl="0" eaLnBrk="1" latinLnBrk="0" hangingPunct="1">
+              <a:defRPr sz="1800" kern="1200">
+                <a:solidFill>
+                  <a:schemeClr val="tx1"/>
+                </a:solidFill>
+                <a:latin typeface="+mn-lt"/>
+                <a:ea typeface="+mn-ea"/>
+                <a:cs typeface="+mn-cs"/>
+              </a:defRPr>
+            </a:lvl3pPr>
+            <a:lvl4pPr marL="1371600" algn="l" defTabSz="914400" rtl="0" eaLnBrk="1" latinLnBrk="0" hangingPunct="1">
+              <a:defRPr sz="1800" kern="1200">
+                <a:solidFill>
+                  <a:schemeClr val="tx1"/>
+                </a:solidFill>
+                <a:latin typeface="+mn-lt"/>
+                <a:ea typeface="+mn-ea"/>
+                <a:cs typeface="+mn-cs"/>
+              </a:defRPr>
+            </a:lvl4pPr>
+            <a:lvl5pPr marL="1828800" algn="l" defTabSz="914400" rtl="0" eaLnBrk="1" latinLnBrk="0" hangingPunct="1">
+              <a:defRPr sz="1800" kern="1200">
+                <a:solidFill>
+                  <a:schemeClr val="tx1"/>
+                </a:solidFill>
+                <a:latin typeface="+mn-lt"/>
+                <a:ea typeface="+mn-ea"/>
+                <a:cs typeface="+mn-cs"/>
+              </a:defRPr>
+            </a:lvl5pPr>
+            <a:lvl6pPr marL="2286000" algn="l" defTabSz="914400" rtl="0" eaLnBrk="1" latinLnBrk="0" hangingPunct="1">
+              <a:defRPr sz="1800" kern="1200">
+                <a:solidFill>
+                  <a:schemeClr val="tx1"/>
+                </a:solidFill>
+                <a:latin typeface="+mn-lt"/>
+                <a:ea typeface="+mn-ea"/>
+                <a:cs typeface="+mn-cs"/>
+              </a:defRPr>
+            </a:lvl6pPr>
+            <a:lvl7pPr marL="2743200" algn="l" defTabSz="914400" rtl="0" eaLnBrk="1" latinLnBrk="0" hangingPunct="1">
+              <a:defRPr sz="1800" kern="1200">
+                <a:solidFill>
+                  <a:schemeClr val="tx1"/>
+                </a:solidFill>
+                <a:latin typeface="+mn-lt"/>
+                <a:ea typeface="+mn-ea"/>
+                <a:cs typeface="+mn-cs"/>
+              </a:defRPr>
+            </a:lvl7pPr>
+            <a:lvl8pPr marL="3200400" algn="l" defTabSz="914400" rtl="0" eaLnBrk="1" latinLnBrk="0" hangingPunct="1">
+              <a:defRPr sz="1800" kern="1200">
+                <a:solidFill>
+                  <a:schemeClr val="tx1"/>
+                </a:solidFill>
+                <a:latin typeface="+mn-lt"/>
+                <a:ea typeface="+mn-ea"/>
+                <a:cs typeface="+mn-cs"/>
+              </a:defRPr>
+            </a:lvl8pPr>
+            <a:lvl9pPr marL="3657600" algn="l" defTabSz="914400" rtl="0" eaLnBrk="1" latinLnBrk="0" hangingPunct="1">
+              <a:defRPr sz="1800" kern="1200">
+                <a:solidFill>
+                  <a:schemeClr val="tx1"/>
+                </a:solidFill>
+                <a:latin typeface="+mn-lt"/>
+                <a:ea typeface="+mn-ea"/>
+                <a:cs typeface="+mn-cs"/>
+              </a:defRPr>
+            </a:lvl9pPr>
+          </a:lstStyle>
+          <a:p>
+            <a:pPr algn="ctr"/>
+            <a:r>
+              <a:rPr lang="en-US" sz="1150" b="1" dirty="0" err="1">
+                <a:solidFill>
+                  <a:srgbClr val="17365D"/>
+                </a:solidFill>
+                <a:latin typeface="Courier New" pitchFamily="34" charset="0"/>
+                <a:ea typeface="Courier New" pitchFamily="34" charset="-122"/>
+                <a:cs typeface="Courier New" pitchFamily="34" charset="-120"/>
+              </a:rPr>
+              <a:t>quality_gate</a:t>
+            </a:r>
+            <a:endParaRPr lang="en-US" sz="1150" dirty="0"/>
+          </a:p>
+        </p:txBody>
+      </p:sp>
+      <p:sp>
+        <p:nvSpPr>
+          <p:cNvPr id="18" name="Shape 21">
+            <a:extLst>
+              <a:ext uri="{FF2B5EF4-FFF2-40B4-BE49-F238E27FC236}">
+                <a16:creationId xmlns:a16="http://schemas.microsoft.com/office/drawing/2014/main" id="{74772399-826A-59D5-3691-A02D2B587944}"/>
+              </a:ext>
+            </a:extLst>
+          </p:cNvPr>
+          <p:cNvSpPr/>
+          <p:nvPr/>
+        </p:nvSpPr>
+        <p:spPr>
+          <a:xfrm>
+            <a:off x="7010400" y="2770632"/>
+            <a:ext cx="1005840" cy="274320"/>
+          </a:xfrm>
+          <a:prstGeom prst="roundRect">
+            <a:avLst>
+              <a:gd name="adj" fmla="val 50000"/>
+            </a:avLst>
+          </a:prstGeom>
+          <a:solidFill>
+            <a:srgbClr val="17365D"/>
+          </a:solidFill>
+          <a:ln/>
+        </p:spPr>
+        <p:txBody>
+          <a:bodyPr/>
+          <a:lstStyle/>
+          <a:p>
+            <a:endParaRPr lang="en-IN"/>
+          </a:p>
+        </p:txBody>
+      </p:sp>
+      <p:sp>
+        <p:nvSpPr>
+          <p:cNvPr id="19" name="Text 22">
+            <a:extLst>
+              <a:ext uri="{FF2B5EF4-FFF2-40B4-BE49-F238E27FC236}">
+                <a16:creationId xmlns:a16="http://schemas.microsoft.com/office/drawing/2014/main" id="{4E81A71A-6F62-967B-096D-B209854BA4DE}"/>
+              </a:ext>
+            </a:extLst>
+          </p:cNvPr>
+          <p:cNvSpPr/>
+          <p:nvPr/>
+        </p:nvSpPr>
+        <p:spPr>
+          <a:xfrm>
+            <a:off x="7010400" y="2770632"/>
+            <a:ext cx="1005840" cy="274320"/>
+          </a:xfrm>
+          <a:prstGeom prst="rect">
+            <a:avLst/>
+          </a:prstGeom>
+          <a:noFill/>
+          <a:ln/>
+        </p:spPr>
+        <p:txBody>
+          <a:bodyPr wrap="square" lIns="0" tIns="0" rIns="0" bIns="0" rtlCol="0" anchor="ctr"/>
+          <a:lstStyle>
+            <a:lvl1pPr marL="0" algn="l" defTabSz="914400" rtl="0" eaLnBrk="1" latinLnBrk="0" hangingPunct="1">
+              <a:defRPr sz="1800" kern="1200">
+                <a:solidFill>
+                  <a:schemeClr val="tx1"/>
+                </a:solidFill>
+                <a:latin typeface="+mn-lt"/>
+                <a:ea typeface="+mn-ea"/>
+                <a:cs typeface="+mn-cs"/>
+              </a:defRPr>
+            </a:lvl1pPr>
+            <a:lvl2pPr marL="457200" algn="l" defTabSz="914400" rtl="0" eaLnBrk="1" latinLnBrk="0" hangingPunct="1">
+              <a:defRPr sz="1800" kern="1200">
+                <a:solidFill>
+                  <a:schemeClr val="tx1"/>
+                </a:solidFill>
+                <a:latin typeface="+mn-lt"/>
+                <a:ea typeface="+mn-ea"/>
+                <a:cs typeface="+mn-cs"/>
+              </a:defRPr>
+            </a:lvl2pPr>
+            <a:lvl3pPr marL="914400" algn="l" defTabSz="914400" rtl="0" eaLnBrk="1" latinLnBrk="0" hangingPunct="1">
+              <a:defRPr sz="1800" kern="1200">
+                <a:solidFill>
+                  <a:schemeClr val="tx1"/>
+                </a:solidFill>
+                <a:latin typeface="+mn-lt"/>
+                <a:ea typeface="+mn-ea"/>
+                <a:cs typeface="+mn-cs"/>
+              </a:defRPr>
+            </a:lvl3pPr>
+            <a:lvl4pPr marL="1371600" algn="l" defTabSz="914400" rtl="0" eaLnBrk="1" latinLnBrk="0" hangingPunct="1">
+              <a:defRPr sz="1800" kern="1200">
+                <a:solidFill>
+                  <a:schemeClr val="tx1"/>
+                </a:solidFill>
+                <a:latin typeface="+mn-lt"/>
+                <a:ea typeface="+mn-ea"/>
+                <a:cs typeface="+mn-cs"/>
+              </a:defRPr>
+            </a:lvl4pPr>
+            <a:lvl5pPr marL="1828800" algn="l" defTabSz="914400" rtl="0" eaLnBrk="1" latinLnBrk="0" hangingPunct="1">
+              <a:defRPr sz="1800" kern="1200">
+                <a:solidFill>
+                  <a:schemeClr val="tx1"/>
+                </a:solidFill>
+                <a:latin typeface="+mn-lt"/>
+                <a:ea typeface="+mn-ea"/>
+                <a:cs typeface="+mn-cs"/>
+              </a:defRPr>
+            </a:lvl5pPr>
+            <a:lvl6pPr marL="2286000" algn="l" defTabSz="914400" rtl="0" eaLnBrk="1" latinLnBrk="0" hangingPunct="1">
+              <a:defRPr sz="1800" kern="1200">
+                <a:solidFill>
+                  <a:schemeClr val="tx1"/>
+                </a:solidFill>
+                <a:latin typeface="+mn-lt"/>
+                <a:ea typeface="+mn-ea"/>
+                <a:cs typeface="+mn-cs"/>
+              </a:defRPr>
+            </a:lvl6pPr>
+            <a:lvl7pPr marL="2743200" algn="l" defTabSz="914400" rtl="0" eaLnBrk="1" latinLnBrk="0" hangingPunct="1">
+              <a:defRPr sz="1800" kern="1200">
+                <a:solidFill>
+                  <a:schemeClr val="tx1"/>
+                </a:solidFill>
+                <a:latin typeface="+mn-lt"/>
+                <a:ea typeface="+mn-ea"/>
+                <a:cs typeface="+mn-cs"/>
+              </a:defRPr>
+            </a:lvl7pPr>
+            <a:lvl8pPr marL="3200400" algn="l" defTabSz="914400" rtl="0" eaLnBrk="1" latinLnBrk="0" hangingPunct="1">
+              <a:defRPr sz="1800" kern="1200">
+                <a:solidFill>
+                  <a:schemeClr val="tx1"/>
+                </a:solidFill>
+                <a:latin typeface="+mn-lt"/>
+                <a:ea typeface="+mn-ea"/>
+                <a:cs typeface="+mn-cs"/>
+              </a:defRPr>
+            </a:lvl8pPr>
+            <a:lvl9pPr marL="3657600" algn="l" defTabSz="914400" rtl="0" eaLnBrk="1" latinLnBrk="0" hangingPunct="1">
+              <a:defRPr sz="1800" kern="1200">
+                <a:solidFill>
+                  <a:schemeClr val="tx1"/>
+                </a:solidFill>
+                <a:latin typeface="+mn-lt"/>
+                <a:ea typeface="+mn-ea"/>
+                <a:cs typeface="+mn-cs"/>
+              </a:defRPr>
+            </a:lvl9pPr>
+          </a:lstStyle>
+          <a:p>
+            <a:pPr marL="0" indent="0" algn="ctr">
+              <a:buNone/>
+            </a:pPr>
+            <a:r>
+              <a:rPr lang="en-US" sz="950" b="1" dirty="0">
+                <a:solidFill>
+                  <a:srgbClr val="FFFFFF"/>
+                </a:solidFill>
+                <a:latin typeface="Arial" pitchFamily="34" charset="0"/>
+                <a:ea typeface="Arial" pitchFamily="34" charset="-122"/>
+                <a:cs typeface="Arial" pitchFamily="34" charset="-120"/>
+              </a:rPr>
+              <a:t>✓ SUCCESS</a:t>
+            </a:r>
+            <a:endParaRPr lang="en-US" sz="950" dirty="0"/>
+          </a:p>
+        </p:txBody>
+      </p:sp>
+      <p:sp>
+        <p:nvSpPr>
+          <p:cNvPr id="20" name="Shape 23">
+            <a:extLst>
+              <a:ext uri="{FF2B5EF4-FFF2-40B4-BE49-F238E27FC236}">
+                <a16:creationId xmlns:a16="http://schemas.microsoft.com/office/drawing/2014/main" id="{FC27ED87-A734-1D3E-9975-23D76379118B}"/>
+              </a:ext>
+            </a:extLst>
+          </p:cNvPr>
+          <p:cNvSpPr/>
+          <p:nvPr/>
+        </p:nvSpPr>
+        <p:spPr>
+          <a:xfrm>
+            <a:off x="8770620" y="2720340"/>
+            <a:ext cx="320040" cy="0"/>
+          </a:xfrm>
+          <a:prstGeom prst="line">
+            <a:avLst/>
+          </a:prstGeom>
+          <a:noFill/>
+          <a:ln w="22225">
+            <a:solidFill>
+              <a:srgbClr val="F28C28"/>
+            </a:solidFill>
+            <a:prstDash val="solid"/>
+            <a:tailEnd type="triangle"/>
+          </a:ln>
+        </p:spPr>
+        <p:txBody>
+          <a:bodyPr/>
+          <a:lstStyle/>
+          <a:p>
+            <a:endParaRPr lang="en-IN"/>
+          </a:p>
+        </p:txBody>
+      </p:sp>
+      <p:sp>
+        <p:nvSpPr>
+          <p:cNvPr id="21" name="Shape 24">
+            <a:extLst>
+              <a:ext uri="{FF2B5EF4-FFF2-40B4-BE49-F238E27FC236}">
+                <a16:creationId xmlns:a16="http://schemas.microsoft.com/office/drawing/2014/main" id="{576F440F-84BF-22D2-607B-1C02FE165F26}"/>
+              </a:ext>
+            </a:extLst>
+          </p:cNvPr>
+          <p:cNvSpPr/>
+          <p:nvPr/>
+        </p:nvSpPr>
+        <p:spPr>
+          <a:xfrm>
+            <a:off x="9090660" y="2240280"/>
+            <a:ext cx="2514600" cy="960120"/>
+          </a:xfrm>
+          <a:prstGeom prst="roundRect">
+            <a:avLst>
+              <a:gd name="adj" fmla="val 6667"/>
+            </a:avLst>
+          </a:prstGeom>
+          <a:solidFill>
+            <a:srgbClr val="EEF2F7"/>
+          </a:solidFill>
+          <a:ln w="15875">
+            <a:solidFill>
+              <a:srgbClr val="17365D"/>
+            </a:solidFill>
+            <a:prstDash val="solid"/>
+          </a:ln>
+        </p:spPr>
+        <p:txBody>
+          <a:bodyPr/>
+          <a:lstStyle/>
+          <a:p>
+            <a:endParaRPr lang="en-IN"/>
+          </a:p>
+        </p:txBody>
+      </p:sp>
+      <p:sp>
+        <p:nvSpPr>
+          <p:cNvPr id="22" name="Text 25">
+            <a:extLst>
+              <a:ext uri="{FF2B5EF4-FFF2-40B4-BE49-F238E27FC236}">
+                <a16:creationId xmlns:a16="http://schemas.microsoft.com/office/drawing/2014/main" id="{30826236-DE44-4BAE-CD9C-BDB15218D5A4}"/>
+              </a:ext>
+            </a:extLst>
+          </p:cNvPr>
+          <p:cNvSpPr/>
+          <p:nvPr/>
+        </p:nvSpPr>
+        <p:spPr>
+          <a:xfrm>
+            <a:off x="9090660" y="2350008"/>
+            <a:ext cx="2514600" cy="365760"/>
+          </a:xfrm>
+          <a:prstGeom prst="rect">
+            <a:avLst/>
+          </a:prstGeom>
+          <a:noFill/>
+          <a:ln/>
+        </p:spPr>
+        <p:txBody>
+          <a:bodyPr wrap="square" lIns="0" tIns="0" rIns="0" bIns="0" rtlCol="0" anchor="ctr"/>
+          <a:lstStyle>
+            <a:lvl1pPr marL="0" algn="l" defTabSz="914400" rtl="0" eaLnBrk="1" latinLnBrk="0" hangingPunct="1">
+              <a:defRPr sz="1800" kern="1200">
+                <a:solidFill>
+                  <a:schemeClr val="tx1"/>
+                </a:solidFill>
+                <a:latin typeface="+mn-lt"/>
+                <a:ea typeface="+mn-ea"/>
+                <a:cs typeface="+mn-cs"/>
+              </a:defRPr>
+            </a:lvl1pPr>
+            <a:lvl2pPr marL="457200" algn="l" defTabSz="914400" rtl="0" eaLnBrk="1" latinLnBrk="0" hangingPunct="1">
+              <a:defRPr sz="1800" kern="1200">
+                <a:solidFill>
+                  <a:schemeClr val="tx1"/>
+                </a:solidFill>
+                <a:latin typeface="+mn-lt"/>
+                <a:ea typeface="+mn-ea"/>
+                <a:cs typeface="+mn-cs"/>
+              </a:defRPr>
+            </a:lvl2pPr>
+            <a:lvl3pPr marL="914400" algn="l" defTabSz="914400" rtl="0" eaLnBrk="1" latinLnBrk="0" hangingPunct="1">
+              <a:defRPr sz="1800" kern="1200">
+                <a:solidFill>
+                  <a:schemeClr val="tx1"/>
+                </a:solidFill>
+                <a:latin typeface="+mn-lt"/>
+                <a:ea typeface="+mn-ea"/>
+                <a:cs typeface="+mn-cs"/>
+              </a:defRPr>
+            </a:lvl3pPr>
+            <a:lvl4pPr marL="1371600" algn="l" defTabSz="914400" rtl="0" eaLnBrk="1" latinLnBrk="0" hangingPunct="1">
+              <a:defRPr sz="1800" kern="1200">
+                <a:solidFill>
+                  <a:schemeClr val="tx1"/>
+                </a:solidFill>
+                <a:latin typeface="+mn-lt"/>
+                <a:ea typeface="+mn-ea"/>
+                <a:cs typeface="+mn-cs"/>
+              </a:defRPr>
+            </a:lvl4pPr>
+            <a:lvl5pPr marL="1828800" algn="l" defTabSz="914400" rtl="0" eaLnBrk="1" latinLnBrk="0" hangingPunct="1">
+              <a:defRPr sz="1800" kern="1200">
+                <a:solidFill>
+                  <a:schemeClr val="tx1"/>
+                </a:solidFill>
+                <a:latin typeface="+mn-lt"/>
+                <a:ea typeface="+mn-ea"/>
+                <a:cs typeface="+mn-cs"/>
+              </a:defRPr>
+            </a:lvl5pPr>
+            <a:lvl6pPr marL="2286000" algn="l" defTabSz="914400" rtl="0" eaLnBrk="1" latinLnBrk="0" hangingPunct="1">
+              <a:defRPr sz="1800" kern="1200">
+                <a:solidFill>
+                  <a:schemeClr val="tx1"/>
+                </a:solidFill>
+                <a:latin typeface="+mn-lt"/>
+                <a:ea typeface="+mn-ea"/>
+                <a:cs typeface="+mn-cs"/>
+              </a:defRPr>
+            </a:lvl6pPr>
+            <a:lvl7pPr marL="2743200" algn="l" defTabSz="914400" rtl="0" eaLnBrk="1" latinLnBrk="0" hangingPunct="1">
+              <a:defRPr sz="1800" kern="1200">
+                <a:solidFill>
+                  <a:schemeClr val="tx1"/>
+                </a:solidFill>
+                <a:latin typeface="+mn-lt"/>
+                <a:ea typeface="+mn-ea"/>
+                <a:cs typeface="+mn-cs"/>
+              </a:defRPr>
+            </a:lvl7pPr>
+            <a:lvl8pPr marL="3200400" algn="l" defTabSz="914400" rtl="0" eaLnBrk="1" latinLnBrk="0" hangingPunct="1">
+              <a:defRPr sz="1800" kern="1200">
+                <a:solidFill>
+                  <a:schemeClr val="tx1"/>
+                </a:solidFill>
+                <a:latin typeface="+mn-lt"/>
+                <a:ea typeface="+mn-ea"/>
+                <a:cs typeface="+mn-cs"/>
+              </a:defRPr>
+            </a:lvl8pPr>
+            <a:lvl9pPr marL="3657600" algn="l" defTabSz="914400" rtl="0" eaLnBrk="1" latinLnBrk="0" hangingPunct="1">
+              <a:defRPr sz="1800" kern="1200">
+                <a:solidFill>
+                  <a:schemeClr val="tx1"/>
+                </a:solidFill>
+                <a:latin typeface="+mn-lt"/>
+                <a:ea typeface="+mn-ea"/>
+                <a:cs typeface="+mn-cs"/>
+              </a:defRPr>
+            </a:lvl9pPr>
+          </a:lstStyle>
+          <a:p>
+            <a:pPr algn="ctr"/>
+            <a:r>
+              <a:rPr lang="en-US" sz="1150" b="1" dirty="0" err="1">
+                <a:solidFill>
+                  <a:srgbClr val="17365D"/>
+                </a:solidFill>
+                <a:latin typeface="Courier New" pitchFamily="34" charset="0"/>
+                <a:ea typeface="Courier New" pitchFamily="34" charset="-122"/>
+                <a:cs typeface="Courier New" pitchFamily="34" charset="-120"/>
+              </a:rPr>
+              <a:t>build_gold_layer</a:t>
+            </a:r>
+            <a:endParaRPr lang="en-US" sz="1150" dirty="0"/>
+          </a:p>
+        </p:txBody>
+      </p:sp>
+      <p:sp>
+        <p:nvSpPr>
+          <p:cNvPr id="23" name="Shape 26">
+            <a:extLst>
+              <a:ext uri="{FF2B5EF4-FFF2-40B4-BE49-F238E27FC236}">
+                <a16:creationId xmlns:a16="http://schemas.microsoft.com/office/drawing/2014/main" id="{403BE045-2B2B-E94F-3C6F-B74E300241FC}"/>
+              </a:ext>
+            </a:extLst>
+          </p:cNvPr>
+          <p:cNvSpPr/>
+          <p:nvPr/>
+        </p:nvSpPr>
+        <p:spPr>
+          <a:xfrm>
+            <a:off x="9845040" y="2770632"/>
+            <a:ext cx="1005840" cy="274320"/>
+          </a:xfrm>
+          <a:prstGeom prst="roundRect">
+            <a:avLst>
+              <a:gd name="adj" fmla="val 50000"/>
+            </a:avLst>
+          </a:prstGeom>
+          <a:solidFill>
+            <a:srgbClr val="17365D"/>
+          </a:solidFill>
+          <a:ln/>
+        </p:spPr>
+        <p:txBody>
+          <a:bodyPr/>
+          <a:lstStyle/>
+          <a:p>
+            <a:endParaRPr lang="en-IN"/>
+          </a:p>
+        </p:txBody>
+      </p:sp>
+      <p:sp>
+        <p:nvSpPr>
+          <p:cNvPr id="24" name="Text 27">
+            <a:extLst>
+              <a:ext uri="{FF2B5EF4-FFF2-40B4-BE49-F238E27FC236}">
+                <a16:creationId xmlns:a16="http://schemas.microsoft.com/office/drawing/2014/main" id="{AF2D85C7-045F-6AA6-50B7-58AC40C47686}"/>
+              </a:ext>
+            </a:extLst>
+          </p:cNvPr>
+          <p:cNvSpPr/>
+          <p:nvPr/>
+        </p:nvSpPr>
+        <p:spPr>
+          <a:xfrm>
+            <a:off x="9845040" y="2770632"/>
+            <a:ext cx="1005840" cy="274320"/>
+          </a:xfrm>
+          <a:prstGeom prst="rect">
+            <a:avLst/>
+          </a:prstGeom>
+          <a:noFill/>
+          <a:ln/>
+        </p:spPr>
+        <p:txBody>
+          <a:bodyPr wrap="square" lIns="0" tIns="0" rIns="0" bIns="0" rtlCol="0" anchor="ctr"/>
+          <a:lstStyle>
+            <a:lvl1pPr marL="0" algn="l" defTabSz="914400" rtl="0" eaLnBrk="1" latinLnBrk="0" hangingPunct="1">
+              <a:defRPr sz="1800" kern="1200">
+                <a:solidFill>
+                  <a:schemeClr val="tx1"/>
+                </a:solidFill>
+                <a:latin typeface="+mn-lt"/>
+                <a:ea typeface="+mn-ea"/>
+                <a:cs typeface="+mn-cs"/>
+              </a:defRPr>
+            </a:lvl1pPr>
+            <a:lvl2pPr marL="457200" algn="l" defTabSz="914400" rtl="0" eaLnBrk="1" latinLnBrk="0" hangingPunct="1">
+              <a:defRPr sz="1800" kern="1200">
+                <a:solidFill>
+                  <a:schemeClr val="tx1"/>
+                </a:solidFill>
+                <a:latin typeface="+mn-lt"/>
+                <a:ea typeface="+mn-ea"/>
+                <a:cs typeface="+mn-cs"/>
+              </a:defRPr>
+            </a:lvl2pPr>
+            <a:lvl3pPr marL="914400" algn="l" defTabSz="914400" rtl="0" eaLnBrk="1" latinLnBrk="0" hangingPunct="1">
+              <a:defRPr sz="1800" kern="1200">
+                <a:solidFill>
+                  <a:schemeClr val="tx1"/>
+                </a:solidFill>
+                <a:latin typeface="+mn-lt"/>
+                <a:ea typeface="+mn-ea"/>
+                <a:cs typeface="+mn-cs"/>
+              </a:defRPr>
+            </a:lvl3pPr>
+            <a:lvl4pPr marL="1371600" algn="l" defTabSz="914400" rtl="0" eaLnBrk="1" latinLnBrk="0" hangingPunct="1">
+              <a:defRPr sz="1800" kern="1200">
+                <a:solidFill>
+                  <a:schemeClr val="tx1"/>
+                </a:solidFill>
+                <a:latin typeface="+mn-lt"/>
+                <a:ea typeface="+mn-ea"/>
+                <a:cs typeface="+mn-cs"/>
+              </a:defRPr>
+            </a:lvl4pPr>
+            <a:lvl5pPr marL="1828800" algn="l" defTabSz="914400" rtl="0" eaLnBrk="1" latinLnBrk="0" hangingPunct="1">
+              <a:defRPr sz="1800" kern="1200">
+                <a:solidFill>
+                  <a:schemeClr val="tx1"/>
+                </a:solidFill>
+                <a:latin typeface="+mn-lt"/>
+                <a:ea typeface="+mn-ea"/>
+                <a:cs typeface="+mn-cs"/>
+              </a:defRPr>
+            </a:lvl5pPr>
+            <a:lvl6pPr marL="2286000" algn="l" defTabSz="914400" rtl="0" eaLnBrk="1" latinLnBrk="0" hangingPunct="1">
+              <a:defRPr sz="1800" kern="1200">
+                <a:solidFill>
+                  <a:schemeClr val="tx1"/>
+                </a:solidFill>
+                <a:latin typeface="+mn-lt"/>
+                <a:ea typeface="+mn-ea"/>
+                <a:cs typeface="+mn-cs"/>
+              </a:defRPr>
+            </a:lvl6pPr>
+            <a:lvl7pPr marL="2743200" algn="l" defTabSz="914400" rtl="0" eaLnBrk="1" latinLnBrk="0" hangingPunct="1">
+              <a:defRPr sz="1800" kern="1200">
+                <a:solidFill>
+                  <a:schemeClr val="tx1"/>
+                </a:solidFill>
+                <a:latin typeface="+mn-lt"/>
+                <a:ea typeface="+mn-ea"/>
+                <a:cs typeface="+mn-cs"/>
+              </a:defRPr>
+            </a:lvl7pPr>
+            <a:lvl8pPr marL="3200400" algn="l" defTabSz="914400" rtl="0" eaLnBrk="1" latinLnBrk="0" hangingPunct="1">
+              <a:defRPr sz="1800" kern="1200">
+                <a:solidFill>
+                  <a:schemeClr val="tx1"/>
+                </a:solidFill>
+                <a:latin typeface="+mn-lt"/>
+                <a:ea typeface="+mn-ea"/>
+                <a:cs typeface="+mn-cs"/>
+              </a:defRPr>
+            </a:lvl8pPr>
+            <a:lvl9pPr marL="3657600" algn="l" defTabSz="914400" rtl="0" eaLnBrk="1" latinLnBrk="0" hangingPunct="1">
+              <a:defRPr sz="1800" kern="1200">
+                <a:solidFill>
+                  <a:schemeClr val="tx1"/>
+                </a:solidFill>
+                <a:latin typeface="+mn-lt"/>
+                <a:ea typeface="+mn-ea"/>
+                <a:cs typeface="+mn-cs"/>
+              </a:defRPr>
+            </a:lvl9pPr>
+          </a:lstStyle>
+          <a:p>
+            <a:pPr marL="0" indent="0" algn="ctr">
+              <a:buNone/>
+            </a:pPr>
+            <a:r>
+              <a:rPr lang="en-US" sz="950" b="1" dirty="0">
+                <a:solidFill>
+                  <a:srgbClr val="FFFFFF"/>
+                </a:solidFill>
+                <a:latin typeface="Arial" pitchFamily="34" charset="0"/>
+                <a:ea typeface="Arial" pitchFamily="34" charset="-122"/>
+                <a:cs typeface="Arial" pitchFamily="34" charset="-120"/>
+              </a:rPr>
+              <a:t>✓ SUCCESS</a:t>
+            </a:r>
+            <a:endParaRPr lang="en-US" sz="950" dirty="0"/>
+          </a:p>
+        </p:txBody>
+      </p:sp>
+      <p:sp>
+        <p:nvSpPr>
+          <p:cNvPr id="26" name="Shape 28">
+            <a:extLst>
+              <a:ext uri="{FF2B5EF4-FFF2-40B4-BE49-F238E27FC236}">
+                <a16:creationId xmlns:a16="http://schemas.microsoft.com/office/drawing/2014/main" id="{065B03E5-4469-B470-42DE-ECC838BB7EFA}"/>
+              </a:ext>
+            </a:extLst>
+          </p:cNvPr>
+          <p:cNvSpPr/>
+          <p:nvPr/>
+        </p:nvSpPr>
+        <p:spPr>
+          <a:xfrm>
+            <a:off x="586740" y="3611880"/>
+            <a:ext cx="2468880" cy="1005840"/>
+          </a:xfrm>
+          <a:prstGeom prst="roundRect">
+            <a:avLst>
+              <a:gd name="adj" fmla="val 6364"/>
+            </a:avLst>
+          </a:prstGeom>
+          <a:solidFill>
+            <a:srgbClr val="FFFFFF"/>
+          </a:solidFill>
+          <a:ln w="12700">
+            <a:solidFill>
+              <a:srgbClr val="E4E6E8"/>
+            </a:solidFill>
+            <a:prstDash val="solid"/>
+          </a:ln>
+        </p:spPr>
+        <p:txBody>
+          <a:bodyPr/>
+          <a:lstStyle/>
+          <a:p>
+            <a:endParaRPr lang="en-IN"/>
+          </a:p>
+        </p:txBody>
+      </p:sp>
+      <p:sp>
+        <p:nvSpPr>
+          <p:cNvPr id="27" name="Text 29">
+            <a:extLst>
+              <a:ext uri="{FF2B5EF4-FFF2-40B4-BE49-F238E27FC236}">
+                <a16:creationId xmlns:a16="http://schemas.microsoft.com/office/drawing/2014/main" id="{D1383CCC-5692-BEEB-E1F1-C25F84507427}"/>
+              </a:ext>
+            </a:extLst>
+          </p:cNvPr>
+          <p:cNvSpPr/>
+          <p:nvPr/>
+        </p:nvSpPr>
+        <p:spPr>
+          <a:xfrm>
+            <a:off x="586740" y="3685032"/>
+            <a:ext cx="2468880" cy="502920"/>
+          </a:xfrm>
+          <a:prstGeom prst="rect">
+            <a:avLst/>
+          </a:prstGeom>
+          <a:noFill/>
+          <a:ln/>
+        </p:spPr>
+        <p:txBody>
+          <a:bodyPr wrap="square" lIns="0" tIns="0" rIns="0" bIns="0" rtlCol="0" anchor="ctr"/>
+          <a:lstStyle>
+            <a:lvl1pPr marL="0" algn="l" defTabSz="914400" rtl="0" eaLnBrk="1" latinLnBrk="0" hangingPunct="1">
+              <a:defRPr sz="1800" kern="1200">
+                <a:solidFill>
+                  <a:schemeClr val="tx1"/>
+                </a:solidFill>
+                <a:latin typeface="+mn-lt"/>
+                <a:ea typeface="+mn-ea"/>
+                <a:cs typeface="+mn-cs"/>
+              </a:defRPr>
+            </a:lvl1pPr>
+            <a:lvl2pPr marL="457200" algn="l" defTabSz="914400" rtl="0" eaLnBrk="1" latinLnBrk="0" hangingPunct="1">
+              <a:defRPr sz="1800" kern="1200">
+                <a:solidFill>
+                  <a:schemeClr val="tx1"/>
+                </a:solidFill>
+                <a:latin typeface="+mn-lt"/>
+                <a:ea typeface="+mn-ea"/>
+                <a:cs typeface="+mn-cs"/>
+              </a:defRPr>
+            </a:lvl2pPr>
+            <a:lvl3pPr marL="914400" algn="l" defTabSz="914400" rtl="0" eaLnBrk="1" latinLnBrk="0" hangingPunct="1">
+              <a:defRPr sz="1800" kern="1200">
+                <a:solidFill>
+                  <a:schemeClr val="tx1"/>
+                </a:solidFill>
+                <a:latin typeface="+mn-lt"/>
+                <a:ea typeface="+mn-ea"/>
+                <a:cs typeface="+mn-cs"/>
+              </a:defRPr>
+            </a:lvl3pPr>
+            <a:lvl4pPr marL="1371600" algn="l" defTabSz="914400" rtl="0" eaLnBrk="1" latinLnBrk="0" hangingPunct="1">
+              <a:defRPr sz="1800" kern="1200">
+                <a:solidFill>
+                  <a:schemeClr val="tx1"/>
+                </a:solidFill>
+                <a:latin typeface="+mn-lt"/>
+                <a:ea typeface="+mn-ea"/>
+                <a:cs typeface="+mn-cs"/>
+              </a:defRPr>
+            </a:lvl4pPr>
+            <a:lvl5pPr marL="1828800" algn="l" defTabSz="914400" rtl="0" eaLnBrk="1" latinLnBrk="0" hangingPunct="1">
+              <a:defRPr sz="1800" kern="1200">
+                <a:solidFill>
+                  <a:schemeClr val="tx1"/>
+                </a:solidFill>
+                <a:latin typeface="+mn-lt"/>
+                <a:ea typeface="+mn-ea"/>
+                <a:cs typeface="+mn-cs"/>
+              </a:defRPr>
+            </a:lvl5pPr>
+            <a:lvl6pPr marL="2286000" algn="l" defTabSz="914400" rtl="0" eaLnBrk="1" latinLnBrk="0" hangingPunct="1">
+              <a:defRPr sz="1800" kern="1200">
+                <a:solidFill>
+                  <a:schemeClr val="tx1"/>
+                </a:solidFill>
+                <a:latin typeface="+mn-lt"/>
+                <a:ea typeface="+mn-ea"/>
+                <a:cs typeface="+mn-cs"/>
+              </a:defRPr>
+            </a:lvl6pPr>
+            <a:lvl7pPr marL="2743200" algn="l" defTabSz="914400" rtl="0" eaLnBrk="1" latinLnBrk="0" hangingPunct="1">
+              <a:defRPr sz="1800" kern="1200">
+                <a:solidFill>
+                  <a:schemeClr val="tx1"/>
+                </a:solidFill>
+                <a:latin typeface="+mn-lt"/>
+                <a:ea typeface="+mn-ea"/>
+                <a:cs typeface="+mn-cs"/>
+              </a:defRPr>
+            </a:lvl7pPr>
+            <a:lvl8pPr marL="3200400" algn="l" defTabSz="914400" rtl="0" eaLnBrk="1" latinLnBrk="0" hangingPunct="1">
+              <a:defRPr sz="1800" kern="1200">
+                <a:solidFill>
+                  <a:schemeClr val="tx1"/>
+                </a:solidFill>
+                <a:latin typeface="+mn-lt"/>
+                <a:ea typeface="+mn-ea"/>
+                <a:cs typeface="+mn-cs"/>
+              </a:defRPr>
+            </a:lvl8pPr>
+            <a:lvl9pPr marL="3657600" algn="l" defTabSz="914400" rtl="0" eaLnBrk="1" latinLnBrk="0" hangingPunct="1">
+              <a:defRPr sz="1800" kern="1200">
+                <a:solidFill>
+                  <a:schemeClr val="tx1"/>
+                </a:solidFill>
+                <a:latin typeface="+mn-lt"/>
+                <a:ea typeface="+mn-ea"/>
+                <a:cs typeface="+mn-cs"/>
+              </a:defRPr>
+            </a:lvl9pPr>
+          </a:lstStyle>
+          <a:p>
+            <a:pPr marL="0" indent="0" algn="ctr">
+              <a:buNone/>
+            </a:pPr>
+            <a:r>
+              <a:rPr lang="en-US" sz="2000" b="1" dirty="0">
+                <a:solidFill>
+                  <a:srgbClr val="17365D"/>
+                </a:solidFill>
+                <a:latin typeface="Arial" pitchFamily="34" charset="0"/>
+                <a:ea typeface="Arial" pitchFamily="34" charset="-122"/>
+                <a:cs typeface="Arial" pitchFamily="34" charset="-120"/>
+              </a:rPr>
+              <a:t>9 / 9</a:t>
+            </a:r>
+            <a:endParaRPr lang="en-US" sz="2000" dirty="0"/>
+          </a:p>
+        </p:txBody>
+      </p:sp>
+      <p:sp>
+        <p:nvSpPr>
+          <p:cNvPr id="28" name="Text 30">
+            <a:extLst>
+              <a:ext uri="{FF2B5EF4-FFF2-40B4-BE49-F238E27FC236}">
+                <a16:creationId xmlns:a16="http://schemas.microsoft.com/office/drawing/2014/main" id="{08BA8297-E192-2BFC-0D62-5E79CF586AE1}"/>
+              </a:ext>
+            </a:extLst>
+          </p:cNvPr>
+          <p:cNvSpPr/>
+          <p:nvPr/>
+        </p:nvSpPr>
+        <p:spPr>
+          <a:xfrm>
+            <a:off x="586740" y="4160520"/>
+            <a:ext cx="2468880" cy="365760"/>
+          </a:xfrm>
+          <a:prstGeom prst="rect">
+            <a:avLst/>
+          </a:prstGeom>
+          <a:noFill/>
+          <a:ln/>
+        </p:spPr>
+        <p:txBody>
+          <a:bodyPr wrap="square" lIns="0" tIns="0" rIns="0" bIns="0" rtlCol="0" anchor="ctr"/>
+          <a:lstStyle>
+            <a:lvl1pPr marL="0" algn="l" defTabSz="914400" rtl="0" eaLnBrk="1" latinLnBrk="0" hangingPunct="1">
+              <a:defRPr sz="1800" kern="1200">
+                <a:solidFill>
+                  <a:schemeClr val="tx1"/>
+                </a:solidFill>
+                <a:latin typeface="+mn-lt"/>
+                <a:ea typeface="+mn-ea"/>
+                <a:cs typeface="+mn-cs"/>
+              </a:defRPr>
+            </a:lvl1pPr>
+            <a:lvl2pPr marL="457200" algn="l" defTabSz="914400" rtl="0" eaLnBrk="1" latinLnBrk="0" hangingPunct="1">
+              <a:defRPr sz="1800" kern="1200">
+                <a:solidFill>
+                  <a:schemeClr val="tx1"/>
+                </a:solidFill>
+                <a:latin typeface="+mn-lt"/>
+                <a:ea typeface="+mn-ea"/>
+                <a:cs typeface="+mn-cs"/>
+              </a:defRPr>
+            </a:lvl2pPr>
+            <a:lvl3pPr marL="914400" algn="l" defTabSz="914400" rtl="0" eaLnBrk="1" latinLnBrk="0" hangingPunct="1">
+              <a:defRPr sz="1800" kern="1200">
+                <a:solidFill>
+                  <a:schemeClr val="tx1"/>
+                </a:solidFill>
+                <a:latin typeface="+mn-lt"/>
+                <a:ea typeface="+mn-ea"/>
+                <a:cs typeface="+mn-cs"/>
+              </a:defRPr>
+            </a:lvl3pPr>
+            <a:lvl4pPr marL="1371600" algn="l" defTabSz="914400" rtl="0" eaLnBrk="1" latinLnBrk="0" hangingPunct="1">
+              <a:defRPr sz="1800" kern="1200">
+                <a:solidFill>
+                  <a:schemeClr val="tx1"/>
+                </a:solidFill>
+                <a:latin typeface="+mn-lt"/>
+                <a:ea typeface="+mn-ea"/>
+                <a:cs typeface="+mn-cs"/>
+              </a:defRPr>
+            </a:lvl4pPr>
+            <a:lvl5pPr marL="1828800" algn="l" defTabSz="914400" rtl="0" eaLnBrk="1" latinLnBrk="0" hangingPunct="1">
+              <a:defRPr sz="1800" kern="1200">
+                <a:solidFill>
+                  <a:schemeClr val="tx1"/>
+                </a:solidFill>
+                <a:latin typeface="+mn-lt"/>
+                <a:ea typeface="+mn-ea"/>
+                <a:cs typeface="+mn-cs"/>
+              </a:defRPr>
+            </a:lvl5pPr>
+            <a:lvl6pPr marL="2286000" algn="l" defTabSz="914400" rtl="0" eaLnBrk="1" latinLnBrk="0" hangingPunct="1">
+              <a:defRPr sz="1800" kern="1200">
+                <a:solidFill>
+                  <a:schemeClr val="tx1"/>
+                </a:solidFill>
+                <a:latin typeface="+mn-lt"/>
+                <a:ea typeface="+mn-ea"/>
+                <a:cs typeface="+mn-cs"/>
+              </a:defRPr>
+            </a:lvl6pPr>
+            <a:lvl7pPr marL="2743200" algn="l" defTabSz="914400" rtl="0" eaLnBrk="1" latinLnBrk="0" hangingPunct="1">
+              <a:defRPr sz="1800" kern="1200">
+                <a:solidFill>
+                  <a:schemeClr val="tx1"/>
+                </a:solidFill>
+                <a:latin typeface="+mn-lt"/>
+                <a:ea typeface="+mn-ea"/>
+                <a:cs typeface="+mn-cs"/>
+              </a:defRPr>
+            </a:lvl7pPr>
+            <a:lvl8pPr marL="3200400" algn="l" defTabSz="914400" rtl="0" eaLnBrk="1" latinLnBrk="0" hangingPunct="1">
+              <a:defRPr sz="1800" kern="1200">
+                <a:solidFill>
+                  <a:schemeClr val="tx1"/>
+                </a:solidFill>
+                <a:latin typeface="+mn-lt"/>
+                <a:ea typeface="+mn-ea"/>
+                <a:cs typeface="+mn-cs"/>
+              </a:defRPr>
+            </a:lvl8pPr>
+            <a:lvl9pPr marL="3657600" algn="l" defTabSz="914400" rtl="0" eaLnBrk="1" latinLnBrk="0" hangingPunct="1">
+              <a:defRPr sz="1800" kern="1200">
+                <a:solidFill>
+                  <a:schemeClr val="tx1"/>
+                </a:solidFill>
+                <a:latin typeface="+mn-lt"/>
+                <a:ea typeface="+mn-ea"/>
+                <a:cs typeface="+mn-cs"/>
+              </a:defRPr>
+            </a:lvl9pPr>
+          </a:lstStyle>
+          <a:p>
+            <a:pPr marL="0" indent="0" algn="ctr">
+              <a:buNone/>
+            </a:pPr>
+            <a:r>
+              <a:rPr lang="en-US" sz="1000" dirty="0">
+                <a:solidFill>
+                  <a:srgbClr val="667084"/>
+                </a:solidFill>
+                <a:latin typeface="Arial" pitchFamily="34" charset="0"/>
+                <a:ea typeface="Arial" pitchFamily="34" charset="-122"/>
+                <a:cs typeface="Arial" pitchFamily="34" charset="-120"/>
+              </a:rPr>
+              <a:t>Tasks Succeeded</a:t>
+            </a:r>
+            <a:endParaRPr lang="en-US" sz="1000" dirty="0"/>
+          </a:p>
+        </p:txBody>
+      </p:sp>
+      <p:sp>
+        <p:nvSpPr>
+          <p:cNvPr id="29" name="Shape 31">
+            <a:extLst>
+              <a:ext uri="{FF2B5EF4-FFF2-40B4-BE49-F238E27FC236}">
+                <a16:creationId xmlns:a16="http://schemas.microsoft.com/office/drawing/2014/main" id="{24134710-D730-88EA-DFCB-CF82A0B50406}"/>
+              </a:ext>
+            </a:extLst>
+          </p:cNvPr>
+          <p:cNvSpPr/>
+          <p:nvPr/>
+        </p:nvSpPr>
+        <p:spPr>
+          <a:xfrm>
+            <a:off x="3284220" y="3611880"/>
+            <a:ext cx="2468880" cy="1005840"/>
+          </a:xfrm>
+          <a:prstGeom prst="roundRect">
+            <a:avLst>
+              <a:gd name="adj" fmla="val 6364"/>
+            </a:avLst>
+          </a:prstGeom>
+          <a:solidFill>
+            <a:srgbClr val="FFFFFF"/>
+          </a:solidFill>
+          <a:ln w="12700">
+            <a:solidFill>
+              <a:srgbClr val="E4E6E8"/>
+            </a:solidFill>
+            <a:prstDash val="solid"/>
+          </a:ln>
+        </p:spPr>
+        <p:txBody>
+          <a:bodyPr/>
+          <a:lstStyle/>
+          <a:p>
+            <a:endParaRPr lang="en-IN"/>
+          </a:p>
+        </p:txBody>
+      </p:sp>
+      <p:sp>
+        <p:nvSpPr>
+          <p:cNvPr id="30" name="Text 32">
+            <a:extLst>
+              <a:ext uri="{FF2B5EF4-FFF2-40B4-BE49-F238E27FC236}">
+                <a16:creationId xmlns:a16="http://schemas.microsoft.com/office/drawing/2014/main" id="{CEBA0C01-A0E3-2E28-3406-6F0431017B9A}"/>
+              </a:ext>
+            </a:extLst>
+          </p:cNvPr>
+          <p:cNvSpPr/>
+          <p:nvPr/>
+        </p:nvSpPr>
+        <p:spPr>
+          <a:xfrm>
+            <a:off x="3284220" y="3685032"/>
+            <a:ext cx="2468880" cy="502920"/>
+          </a:xfrm>
+          <a:prstGeom prst="rect">
+            <a:avLst/>
+          </a:prstGeom>
+          <a:noFill/>
+          <a:ln/>
+        </p:spPr>
+        <p:txBody>
+          <a:bodyPr wrap="square" lIns="0" tIns="0" rIns="0" bIns="0" rtlCol="0" anchor="ctr"/>
+          <a:lstStyle>
+            <a:lvl1pPr marL="0" algn="l" defTabSz="914400" rtl="0" eaLnBrk="1" latinLnBrk="0" hangingPunct="1">
+              <a:defRPr sz="1800" kern="1200">
+                <a:solidFill>
+                  <a:schemeClr val="tx1"/>
+                </a:solidFill>
+                <a:latin typeface="+mn-lt"/>
+                <a:ea typeface="+mn-ea"/>
+                <a:cs typeface="+mn-cs"/>
+              </a:defRPr>
+            </a:lvl1pPr>
+            <a:lvl2pPr marL="457200" algn="l" defTabSz="914400" rtl="0" eaLnBrk="1" latinLnBrk="0" hangingPunct="1">
+              <a:defRPr sz="1800" kern="1200">
+                <a:solidFill>
+                  <a:schemeClr val="tx1"/>
+                </a:solidFill>
+                <a:latin typeface="+mn-lt"/>
+                <a:ea typeface="+mn-ea"/>
+                <a:cs typeface="+mn-cs"/>
+              </a:defRPr>
+            </a:lvl2pPr>
+            <a:lvl3pPr marL="914400" algn="l" defTabSz="914400" rtl="0" eaLnBrk="1" latinLnBrk="0" hangingPunct="1">
+              <a:defRPr sz="1800" kern="1200">
+                <a:solidFill>
+                  <a:schemeClr val="tx1"/>
+                </a:solidFill>
+                <a:latin typeface="+mn-lt"/>
+                <a:ea typeface="+mn-ea"/>
+                <a:cs typeface="+mn-cs"/>
+              </a:defRPr>
+            </a:lvl3pPr>
+            <a:lvl4pPr marL="1371600" algn="l" defTabSz="914400" rtl="0" eaLnBrk="1" latinLnBrk="0" hangingPunct="1">
+              <a:defRPr sz="1800" kern="1200">
+                <a:solidFill>
+                  <a:schemeClr val="tx1"/>
+                </a:solidFill>
+                <a:latin typeface="+mn-lt"/>
+                <a:ea typeface="+mn-ea"/>
+                <a:cs typeface="+mn-cs"/>
+              </a:defRPr>
+            </a:lvl4pPr>
+            <a:lvl5pPr marL="1828800" algn="l" defTabSz="914400" rtl="0" eaLnBrk="1" latinLnBrk="0" hangingPunct="1">
+              <a:defRPr sz="1800" kern="1200">
+                <a:solidFill>
+                  <a:schemeClr val="tx1"/>
+                </a:solidFill>
+                <a:latin typeface="+mn-lt"/>
+                <a:ea typeface="+mn-ea"/>
+                <a:cs typeface="+mn-cs"/>
+              </a:defRPr>
+            </a:lvl5pPr>
+            <a:lvl6pPr marL="2286000" algn="l" defTabSz="914400" rtl="0" eaLnBrk="1" latinLnBrk="0" hangingPunct="1">
+              <a:defRPr sz="1800" kern="1200">
+                <a:solidFill>
+                  <a:schemeClr val="tx1"/>
+                </a:solidFill>
+                <a:latin typeface="+mn-lt"/>
+                <a:ea typeface="+mn-ea"/>
+                <a:cs typeface="+mn-cs"/>
+              </a:defRPr>
+            </a:lvl6pPr>
+            <a:lvl7pPr marL="2743200" algn="l" defTabSz="914400" rtl="0" eaLnBrk="1" latinLnBrk="0" hangingPunct="1">
+              <a:defRPr sz="1800" kern="1200">
+                <a:solidFill>
+                  <a:schemeClr val="tx1"/>
+                </a:solidFill>
+                <a:latin typeface="+mn-lt"/>
+                <a:ea typeface="+mn-ea"/>
+                <a:cs typeface="+mn-cs"/>
+              </a:defRPr>
+            </a:lvl7pPr>
+            <a:lvl8pPr marL="3200400" algn="l" defTabSz="914400" rtl="0" eaLnBrk="1" latinLnBrk="0" hangingPunct="1">
+              <a:defRPr sz="1800" kern="1200">
+                <a:solidFill>
+                  <a:schemeClr val="tx1"/>
+                </a:solidFill>
+                <a:latin typeface="+mn-lt"/>
+                <a:ea typeface="+mn-ea"/>
+                <a:cs typeface="+mn-cs"/>
+              </a:defRPr>
+            </a:lvl8pPr>
+            <a:lvl9pPr marL="3657600" algn="l" defTabSz="914400" rtl="0" eaLnBrk="1" latinLnBrk="0" hangingPunct="1">
+              <a:defRPr sz="1800" kern="1200">
+                <a:solidFill>
+                  <a:schemeClr val="tx1"/>
+                </a:solidFill>
+                <a:latin typeface="+mn-lt"/>
+                <a:ea typeface="+mn-ea"/>
+                <a:cs typeface="+mn-cs"/>
+              </a:defRPr>
+            </a:lvl9pPr>
+          </a:lstStyle>
+          <a:p>
+            <a:pPr marL="0" indent="0" algn="ctr">
+              <a:buNone/>
+            </a:pPr>
+            <a:r>
+              <a:rPr lang="en-US" sz="2000" b="1" dirty="0">
+                <a:solidFill>
+                  <a:srgbClr val="17365D"/>
+                </a:solidFill>
+                <a:latin typeface="Arial" pitchFamily="34" charset="0"/>
+                <a:ea typeface="Arial" pitchFamily="34" charset="-122"/>
+                <a:cs typeface="Arial" pitchFamily="34" charset="-120"/>
+              </a:rPr>
+              <a:t>≈ 2 min</a:t>
+            </a:r>
+            <a:endParaRPr lang="en-US" sz="2000" dirty="0"/>
+          </a:p>
+        </p:txBody>
+      </p:sp>
+      <p:sp>
+        <p:nvSpPr>
+          <p:cNvPr id="31" name="Text 33">
+            <a:extLst>
+              <a:ext uri="{FF2B5EF4-FFF2-40B4-BE49-F238E27FC236}">
+                <a16:creationId xmlns:a16="http://schemas.microsoft.com/office/drawing/2014/main" id="{56C81DB4-D2D9-79FA-643B-97FAFDEFC00A}"/>
+              </a:ext>
+            </a:extLst>
+          </p:cNvPr>
+          <p:cNvSpPr/>
+          <p:nvPr/>
+        </p:nvSpPr>
+        <p:spPr>
+          <a:xfrm>
+            <a:off x="3284220" y="4160520"/>
+            <a:ext cx="2468880" cy="365760"/>
+          </a:xfrm>
+          <a:prstGeom prst="rect">
+            <a:avLst/>
+          </a:prstGeom>
+          <a:noFill/>
+          <a:ln/>
+        </p:spPr>
+        <p:txBody>
+          <a:bodyPr wrap="square" lIns="0" tIns="0" rIns="0" bIns="0" rtlCol="0" anchor="ctr"/>
+          <a:lstStyle>
+            <a:lvl1pPr marL="0" algn="l" defTabSz="914400" rtl="0" eaLnBrk="1" latinLnBrk="0" hangingPunct="1">
+              <a:defRPr sz="1800" kern="1200">
+                <a:solidFill>
+                  <a:schemeClr val="tx1"/>
+                </a:solidFill>
+                <a:latin typeface="+mn-lt"/>
+                <a:ea typeface="+mn-ea"/>
+                <a:cs typeface="+mn-cs"/>
+              </a:defRPr>
+            </a:lvl1pPr>
+            <a:lvl2pPr marL="457200" algn="l" defTabSz="914400" rtl="0" eaLnBrk="1" latinLnBrk="0" hangingPunct="1">
+              <a:defRPr sz="1800" kern="1200">
+                <a:solidFill>
+                  <a:schemeClr val="tx1"/>
+                </a:solidFill>
+                <a:latin typeface="+mn-lt"/>
+                <a:ea typeface="+mn-ea"/>
+                <a:cs typeface="+mn-cs"/>
+              </a:defRPr>
+            </a:lvl2pPr>
+            <a:lvl3pPr marL="914400" algn="l" defTabSz="914400" rtl="0" eaLnBrk="1" latinLnBrk="0" hangingPunct="1">
+              <a:defRPr sz="1800" kern="1200">
+                <a:solidFill>
+                  <a:schemeClr val="tx1"/>
+                </a:solidFill>
+                <a:latin typeface="+mn-lt"/>
+                <a:ea typeface="+mn-ea"/>
+                <a:cs typeface="+mn-cs"/>
+              </a:defRPr>
+            </a:lvl3pPr>
+            <a:lvl4pPr marL="1371600" algn="l" defTabSz="914400" rtl="0" eaLnBrk="1" latinLnBrk="0" hangingPunct="1">
+              <a:defRPr sz="1800" kern="1200">
+                <a:solidFill>
+                  <a:schemeClr val="tx1"/>
+                </a:solidFill>
+                <a:latin typeface="+mn-lt"/>
+                <a:ea typeface="+mn-ea"/>
+                <a:cs typeface="+mn-cs"/>
+              </a:defRPr>
+            </a:lvl4pPr>
+            <a:lvl5pPr marL="1828800" algn="l" defTabSz="914400" rtl="0" eaLnBrk="1" latinLnBrk="0" hangingPunct="1">
+              <a:defRPr sz="1800" kern="1200">
+                <a:solidFill>
+                  <a:schemeClr val="tx1"/>
+                </a:solidFill>
+                <a:latin typeface="+mn-lt"/>
+                <a:ea typeface="+mn-ea"/>
+                <a:cs typeface="+mn-cs"/>
+              </a:defRPr>
+            </a:lvl5pPr>
+            <a:lvl6pPr marL="2286000" algn="l" defTabSz="914400" rtl="0" eaLnBrk="1" latinLnBrk="0" hangingPunct="1">
+              <a:defRPr sz="1800" kern="1200">
+                <a:solidFill>
+                  <a:schemeClr val="tx1"/>
+                </a:solidFill>
+                <a:latin typeface="+mn-lt"/>
+                <a:ea typeface="+mn-ea"/>
+                <a:cs typeface="+mn-cs"/>
+              </a:defRPr>
+            </a:lvl6pPr>
+            <a:lvl7pPr marL="2743200" algn="l" defTabSz="914400" rtl="0" eaLnBrk="1" latinLnBrk="0" hangingPunct="1">
+              <a:defRPr sz="1800" kern="1200">
+                <a:solidFill>
+                  <a:schemeClr val="tx1"/>
+                </a:solidFill>
+                <a:latin typeface="+mn-lt"/>
+                <a:ea typeface="+mn-ea"/>
+                <a:cs typeface="+mn-cs"/>
+              </a:defRPr>
+            </a:lvl7pPr>
+            <a:lvl8pPr marL="3200400" algn="l" defTabSz="914400" rtl="0" eaLnBrk="1" latinLnBrk="0" hangingPunct="1">
+              <a:defRPr sz="1800" kern="1200">
+                <a:solidFill>
+                  <a:schemeClr val="tx1"/>
+                </a:solidFill>
+                <a:latin typeface="+mn-lt"/>
+                <a:ea typeface="+mn-ea"/>
+                <a:cs typeface="+mn-cs"/>
+              </a:defRPr>
+            </a:lvl8pPr>
+            <a:lvl9pPr marL="3657600" algn="l" defTabSz="914400" rtl="0" eaLnBrk="1" latinLnBrk="0" hangingPunct="1">
+              <a:defRPr sz="1800" kern="1200">
+                <a:solidFill>
+                  <a:schemeClr val="tx1"/>
+                </a:solidFill>
+                <a:latin typeface="+mn-lt"/>
+                <a:ea typeface="+mn-ea"/>
+                <a:cs typeface="+mn-cs"/>
+              </a:defRPr>
+            </a:lvl9pPr>
+          </a:lstStyle>
+          <a:p>
+            <a:pPr marL="0" indent="0" algn="ctr">
+              <a:buNone/>
+            </a:pPr>
+            <a:r>
+              <a:rPr lang="en-US" sz="1000" dirty="0">
+                <a:solidFill>
+                  <a:srgbClr val="667084"/>
+                </a:solidFill>
+                <a:latin typeface="Arial" pitchFamily="34" charset="0"/>
+                <a:ea typeface="Arial" pitchFamily="34" charset="-122"/>
+                <a:cs typeface="Arial" pitchFamily="34" charset="-120"/>
+              </a:rPr>
+              <a:t>Total Runtime</a:t>
+            </a:r>
+            <a:endParaRPr lang="en-US" sz="1000" dirty="0"/>
+          </a:p>
+        </p:txBody>
+      </p:sp>
+      <p:sp>
+        <p:nvSpPr>
+          <p:cNvPr id="32" name="Shape 34">
+            <a:extLst>
+              <a:ext uri="{FF2B5EF4-FFF2-40B4-BE49-F238E27FC236}">
+                <a16:creationId xmlns:a16="http://schemas.microsoft.com/office/drawing/2014/main" id="{EC2B70DB-F280-95A0-71E0-E21D0AD749F3}"/>
+              </a:ext>
+            </a:extLst>
+          </p:cNvPr>
+          <p:cNvSpPr/>
+          <p:nvPr/>
+        </p:nvSpPr>
+        <p:spPr>
+          <a:xfrm>
+            <a:off x="5981700" y="3611880"/>
+            <a:ext cx="2468880" cy="1005840"/>
+          </a:xfrm>
+          <a:prstGeom prst="roundRect">
+            <a:avLst>
+              <a:gd name="adj" fmla="val 6364"/>
+            </a:avLst>
+          </a:prstGeom>
+          <a:solidFill>
+            <a:srgbClr val="FFFFFF"/>
+          </a:solidFill>
+          <a:ln w="12700">
+            <a:solidFill>
+              <a:srgbClr val="E4E6E8"/>
+            </a:solidFill>
+            <a:prstDash val="solid"/>
+          </a:ln>
+        </p:spPr>
+        <p:txBody>
+          <a:bodyPr/>
+          <a:lstStyle/>
+          <a:p>
+            <a:endParaRPr lang="en-IN"/>
+          </a:p>
+        </p:txBody>
+      </p:sp>
+      <p:sp>
+        <p:nvSpPr>
+          <p:cNvPr id="33" name="Text 35">
+            <a:extLst>
+              <a:ext uri="{FF2B5EF4-FFF2-40B4-BE49-F238E27FC236}">
+                <a16:creationId xmlns:a16="http://schemas.microsoft.com/office/drawing/2014/main" id="{CF40FB7E-9F2E-F2A7-33D8-E14EEB7CB130}"/>
+              </a:ext>
+            </a:extLst>
+          </p:cNvPr>
+          <p:cNvSpPr/>
+          <p:nvPr/>
+        </p:nvSpPr>
+        <p:spPr>
+          <a:xfrm>
+            <a:off x="5981700" y="3685032"/>
+            <a:ext cx="2468880" cy="502920"/>
+          </a:xfrm>
+          <a:prstGeom prst="rect">
+            <a:avLst/>
+          </a:prstGeom>
+          <a:noFill/>
+          <a:ln/>
+        </p:spPr>
+        <p:txBody>
+          <a:bodyPr wrap="square" lIns="0" tIns="0" rIns="0" bIns="0" rtlCol="0" anchor="ctr"/>
+          <a:lstStyle>
+            <a:lvl1pPr marL="0" algn="l" defTabSz="914400" rtl="0" eaLnBrk="1" latinLnBrk="0" hangingPunct="1">
+              <a:defRPr sz="1800" kern="1200">
+                <a:solidFill>
+                  <a:schemeClr val="tx1"/>
+                </a:solidFill>
+                <a:latin typeface="+mn-lt"/>
+                <a:ea typeface="+mn-ea"/>
+                <a:cs typeface="+mn-cs"/>
+              </a:defRPr>
+            </a:lvl1pPr>
+            <a:lvl2pPr marL="457200" algn="l" defTabSz="914400" rtl="0" eaLnBrk="1" latinLnBrk="0" hangingPunct="1">
+              <a:defRPr sz="1800" kern="1200">
+                <a:solidFill>
+                  <a:schemeClr val="tx1"/>
+                </a:solidFill>
+                <a:latin typeface="+mn-lt"/>
+                <a:ea typeface="+mn-ea"/>
+                <a:cs typeface="+mn-cs"/>
+              </a:defRPr>
+            </a:lvl2pPr>
+            <a:lvl3pPr marL="914400" algn="l" defTabSz="914400" rtl="0" eaLnBrk="1" latinLnBrk="0" hangingPunct="1">
+              <a:defRPr sz="1800" kern="1200">
+                <a:solidFill>
+                  <a:schemeClr val="tx1"/>
+                </a:solidFill>
+                <a:latin typeface="+mn-lt"/>
+                <a:ea typeface="+mn-ea"/>
+                <a:cs typeface="+mn-cs"/>
+              </a:defRPr>
+            </a:lvl3pPr>
+            <a:lvl4pPr marL="1371600" algn="l" defTabSz="914400" rtl="0" eaLnBrk="1" latinLnBrk="0" hangingPunct="1">
+              <a:defRPr sz="1800" kern="1200">
+                <a:solidFill>
+                  <a:schemeClr val="tx1"/>
+                </a:solidFill>
+                <a:latin typeface="+mn-lt"/>
+                <a:ea typeface="+mn-ea"/>
+                <a:cs typeface="+mn-cs"/>
+              </a:defRPr>
+            </a:lvl4pPr>
+            <a:lvl5pPr marL="1828800" algn="l" defTabSz="914400" rtl="0" eaLnBrk="1" latinLnBrk="0" hangingPunct="1">
+              <a:defRPr sz="1800" kern="1200">
+                <a:solidFill>
+                  <a:schemeClr val="tx1"/>
+                </a:solidFill>
+                <a:latin typeface="+mn-lt"/>
+                <a:ea typeface="+mn-ea"/>
+                <a:cs typeface="+mn-cs"/>
+              </a:defRPr>
+            </a:lvl5pPr>
+            <a:lvl6pPr marL="2286000" algn="l" defTabSz="914400" rtl="0" eaLnBrk="1" latinLnBrk="0" hangingPunct="1">
+              <a:defRPr sz="1800" kern="1200">
+                <a:solidFill>
+                  <a:schemeClr val="tx1"/>
+                </a:solidFill>
+                <a:latin typeface="+mn-lt"/>
+                <a:ea typeface="+mn-ea"/>
+                <a:cs typeface="+mn-cs"/>
+              </a:defRPr>
+            </a:lvl6pPr>
+            <a:lvl7pPr marL="2743200" algn="l" defTabSz="914400" rtl="0" eaLnBrk="1" latinLnBrk="0" hangingPunct="1">
+              <a:defRPr sz="1800" kern="1200">
+                <a:solidFill>
+                  <a:schemeClr val="tx1"/>
+                </a:solidFill>
+                <a:latin typeface="+mn-lt"/>
+                <a:ea typeface="+mn-ea"/>
+                <a:cs typeface="+mn-cs"/>
+              </a:defRPr>
+            </a:lvl7pPr>
+            <a:lvl8pPr marL="3200400" algn="l" defTabSz="914400" rtl="0" eaLnBrk="1" latinLnBrk="0" hangingPunct="1">
+              <a:defRPr sz="1800" kern="1200">
+                <a:solidFill>
+                  <a:schemeClr val="tx1"/>
+                </a:solidFill>
+                <a:latin typeface="+mn-lt"/>
+                <a:ea typeface="+mn-ea"/>
+                <a:cs typeface="+mn-cs"/>
+              </a:defRPr>
+            </a:lvl8pPr>
+            <a:lvl9pPr marL="3657600" algn="l" defTabSz="914400" rtl="0" eaLnBrk="1" latinLnBrk="0" hangingPunct="1">
+              <a:defRPr sz="1800" kern="1200">
+                <a:solidFill>
+                  <a:schemeClr val="tx1"/>
+                </a:solidFill>
+                <a:latin typeface="+mn-lt"/>
+                <a:ea typeface="+mn-ea"/>
+                <a:cs typeface="+mn-cs"/>
+              </a:defRPr>
+            </a:lvl9pPr>
+          </a:lstStyle>
+          <a:p>
+            <a:pPr marL="0" indent="0" algn="ctr">
+              <a:buNone/>
+            </a:pPr>
+            <a:r>
+              <a:rPr lang="en-US" sz="2000" b="1" dirty="0">
+                <a:solidFill>
+                  <a:srgbClr val="17365D"/>
+                </a:solidFill>
+                <a:latin typeface="Arial" pitchFamily="34" charset="0"/>
+                <a:ea typeface="Arial" pitchFamily="34" charset="-122"/>
+                <a:cs typeface="Arial" pitchFamily="34" charset="-120"/>
+              </a:rPr>
+              <a:t>6,304</a:t>
+            </a:r>
+            <a:endParaRPr lang="en-US" sz="2000" dirty="0"/>
+          </a:p>
+        </p:txBody>
+      </p:sp>
+      <p:sp>
+        <p:nvSpPr>
+          <p:cNvPr id="34" name="Text 36">
+            <a:extLst>
+              <a:ext uri="{FF2B5EF4-FFF2-40B4-BE49-F238E27FC236}">
+                <a16:creationId xmlns:a16="http://schemas.microsoft.com/office/drawing/2014/main" id="{E5F9BE44-43E3-4747-E198-B9597FF934AC}"/>
+              </a:ext>
+            </a:extLst>
+          </p:cNvPr>
+          <p:cNvSpPr/>
+          <p:nvPr/>
+        </p:nvSpPr>
+        <p:spPr>
+          <a:xfrm>
+            <a:off x="5981700" y="4160520"/>
+            <a:ext cx="2468880" cy="365760"/>
+          </a:xfrm>
+          <a:prstGeom prst="rect">
+            <a:avLst/>
+          </a:prstGeom>
+          <a:noFill/>
+          <a:ln/>
+        </p:spPr>
+        <p:txBody>
+          <a:bodyPr wrap="square" lIns="0" tIns="0" rIns="0" bIns="0" rtlCol="0" anchor="ctr"/>
+          <a:lstStyle>
+            <a:lvl1pPr marL="0" algn="l" defTabSz="914400" rtl="0" eaLnBrk="1" latinLnBrk="0" hangingPunct="1">
+              <a:defRPr sz="1800" kern="1200">
+                <a:solidFill>
+                  <a:schemeClr val="tx1"/>
+                </a:solidFill>
+                <a:latin typeface="+mn-lt"/>
+                <a:ea typeface="+mn-ea"/>
+                <a:cs typeface="+mn-cs"/>
+              </a:defRPr>
+            </a:lvl1pPr>
+            <a:lvl2pPr marL="457200" algn="l" defTabSz="914400" rtl="0" eaLnBrk="1" latinLnBrk="0" hangingPunct="1">
+              <a:defRPr sz="1800" kern="1200">
+                <a:solidFill>
+                  <a:schemeClr val="tx1"/>
+                </a:solidFill>
+                <a:latin typeface="+mn-lt"/>
+                <a:ea typeface="+mn-ea"/>
+                <a:cs typeface="+mn-cs"/>
+              </a:defRPr>
+            </a:lvl2pPr>
+            <a:lvl3pPr marL="914400" algn="l" defTabSz="914400" rtl="0" eaLnBrk="1" latinLnBrk="0" hangingPunct="1">
+              <a:defRPr sz="1800" kern="1200">
+                <a:solidFill>
+                  <a:schemeClr val="tx1"/>
+                </a:solidFill>
+                <a:latin typeface="+mn-lt"/>
+                <a:ea typeface="+mn-ea"/>
+                <a:cs typeface="+mn-cs"/>
+              </a:defRPr>
+            </a:lvl3pPr>
+            <a:lvl4pPr marL="1371600" algn="l" defTabSz="914400" rtl="0" eaLnBrk="1" latinLnBrk="0" hangingPunct="1">
+              <a:defRPr sz="1800" kern="1200">
+                <a:solidFill>
+                  <a:schemeClr val="tx1"/>
+                </a:solidFill>
+                <a:latin typeface="+mn-lt"/>
+                <a:ea typeface="+mn-ea"/>
+                <a:cs typeface="+mn-cs"/>
+              </a:defRPr>
+            </a:lvl4pPr>
+            <a:lvl5pPr marL="1828800" algn="l" defTabSz="914400" rtl="0" eaLnBrk="1" latinLnBrk="0" hangingPunct="1">
+              <a:defRPr sz="1800" kern="1200">
+                <a:solidFill>
+                  <a:schemeClr val="tx1"/>
+                </a:solidFill>
+                <a:latin typeface="+mn-lt"/>
+                <a:ea typeface="+mn-ea"/>
+                <a:cs typeface="+mn-cs"/>
+              </a:defRPr>
+            </a:lvl5pPr>
+            <a:lvl6pPr marL="2286000" algn="l" defTabSz="914400" rtl="0" eaLnBrk="1" latinLnBrk="0" hangingPunct="1">
+              <a:defRPr sz="1800" kern="1200">
+                <a:solidFill>
+                  <a:schemeClr val="tx1"/>
+                </a:solidFill>
+                <a:latin typeface="+mn-lt"/>
+                <a:ea typeface="+mn-ea"/>
+                <a:cs typeface="+mn-cs"/>
+              </a:defRPr>
+            </a:lvl6pPr>
+            <a:lvl7pPr marL="2743200" algn="l" defTabSz="914400" rtl="0" eaLnBrk="1" latinLnBrk="0" hangingPunct="1">
+              <a:defRPr sz="1800" kern="1200">
+                <a:solidFill>
+                  <a:schemeClr val="tx1"/>
+                </a:solidFill>
+                <a:latin typeface="+mn-lt"/>
+                <a:ea typeface="+mn-ea"/>
+                <a:cs typeface="+mn-cs"/>
+              </a:defRPr>
+            </a:lvl7pPr>
+            <a:lvl8pPr marL="3200400" algn="l" defTabSz="914400" rtl="0" eaLnBrk="1" latinLnBrk="0" hangingPunct="1">
+              <a:defRPr sz="1800" kern="1200">
+                <a:solidFill>
+                  <a:schemeClr val="tx1"/>
+                </a:solidFill>
+                <a:latin typeface="+mn-lt"/>
+                <a:ea typeface="+mn-ea"/>
+                <a:cs typeface="+mn-cs"/>
+              </a:defRPr>
+            </a:lvl8pPr>
+            <a:lvl9pPr marL="3657600" algn="l" defTabSz="914400" rtl="0" eaLnBrk="1" latinLnBrk="0" hangingPunct="1">
+              <a:defRPr sz="1800" kern="1200">
+                <a:solidFill>
+                  <a:schemeClr val="tx1"/>
+                </a:solidFill>
+                <a:latin typeface="+mn-lt"/>
+                <a:ea typeface="+mn-ea"/>
+                <a:cs typeface="+mn-cs"/>
+              </a:defRPr>
+            </a:lvl9pPr>
+          </a:lstStyle>
+          <a:p>
+            <a:pPr marL="0" indent="0" algn="ctr">
+              <a:buNone/>
+            </a:pPr>
+            <a:r>
+              <a:rPr lang="en-US" sz="1000" dirty="0">
+                <a:solidFill>
+                  <a:srgbClr val="667084"/>
+                </a:solidFill>
+                <a:latin typeface="Arial" pitchFamily="34" charset="0"/>
+                <a:ea typeface="Arial" pitchFamily="34" charset="-122"/>
+                <a:cs typeface="Arial" pitchFamily="34" charset="-120"/>
+              </a:rPr>
+              <a:t>Rows Processed</a:t>
+            </a:r>
+            <a:endParaRPr lang="en-US" sz="1000" dirty="0"/>
+          </a:p>
+        </p:txBody>
+      </p:sp>
+      <p:sp>
+        <p:nvSpPr>
+          <p:cNvPr id="35" name="Shape 37">
+            <a:extLst>
+              <a:ext uri="{FF2B5EF4-FFF2-40B4-BE49-F238E27FC236}">
+                <a16:creationId xmlns:a16="http://schemas.microsoft.com/office/drawing/2014/main" id="{E409638C-2566-8D18-05C1-AD25B83E188C}"/>
+              </a:ext>
+            </a:extLst>
+          </p:cNvPr>
+          <p:cNvSpPr/>
+          <p:nvPr/>
+        </p:nvSpPr>
+        <p:spPr>
+          <a:xfrm>
+            <a:off x="8679180" y="3611880"/>
+            <a:ext cx="2468880" cy="1005840"/>
+          </a:xfrm>
+          <a:prstGeom prst="roundRect">
+            <a:avLst>
+              <a:gd name="adj" fmla="val 6364"/>
+            </a:avLst>
+          </a:prstGeom>
+          <a:solidFill>
+            <a:srgbClr val="FFFFFF"/>
+          </a:solidFill>
+          <a:ln w="12700">
+            <a:solidFill>
+              <a:srgbClr val="E4E6E8"/>
+            </a:solidFill>
+            <a:prstDash val="solid"/>
+          </a:ln>
+        </p:spPr>
+        <p:txBody>
+          <a:bodyPr/>
+          <a:lstStyle/>
+          <a:p>
+            <a:endParaRPr lang="en-IN"/>
+          </a:p>
+        </p:txBody>
+      </p:sp>
+      <p:sp>
+        <p:nvSpPr>
+          <p:cNvPr id="36" name="Text 38">
+            <a:extLst>
+              <a:ext uri="{FF2B5EF4-FFF2-40B4-BE49-F238E27FC236}">
+                <a16:creationId xmlns:a16="http://schemas.microsoft.com/office/drawing/2014/main" id="{822C9391-C132-1A59-B054-AE55067CB31A}"/>
+              </a:ext>
+            </a:extLst>
+          </p:cNvPr>
+          <p:cNvSpPr/>
+          <p:nvPr/>
+        </p:nvSpPr>
+        <p:spPr>
+          <a:xfrm>
+            <a:off x="8679180" y="3685032"/>
+            <a:ext cx="2468880" cy="502920"/>
+          </a:xfrm>
+          <a:prstGeom prst="rect">
+            <a:avLst/>
+          </a:prstGeom>
+          <a:noFill/>
+          <a:ln/>
+        </p:spPr>
+        <p:txBody>
+          <a:bodyPr wrap="square" lIns="0" tIns="0" rIns="0" bIns="0" rtlCol="0" anchor="ctr"/>
+          <a:lstStyle>
+            <a:lvl1pPr marL="0" algn="l" defTabSz="914400" rtl="0" eaLnBrk="1" latinLnBrk="0" hangingPunct="1">
+              <a:defRPr sz="1800" kern="1200">
+                <a:solidFill>
+                  <a:schemeClr val="tx1"/>
+                </a:solidFill>
+                <a:latin typeface="+mn-lt"/>
+                <a:ea typeface="+mn-ea"/>
+                <a:cs typeface="+mn-cs"/>
+              </a:defRPr>
+            </a:lvl1pPr>
+            <a:lvl2pPr marL="457200" algn="l" defTabSz="914400" rtl="0" eaLnBrk="1" latinLnBrk="0" hangingPunct="1">
+              <a:defRPr sz="1800" kern="1200">
+                <a:solidFill>
+                  <a:schemeClr val="tx1"/>
+                </a:solidFill>
+                <a:latin typeface="+mn-lt"/>
+                <a:ea typeface="+mn-ea"/>
+                <a:cs typeface="+mn-cs"/>
+              </a:defRPr>
+            </a:lvl2pPr>
+            <a:lvl3pPr marL="914400" algn="l" defTabSz="914400" rtl="0" eaLnBrk="1" latinLnBrk="0" hangingPunct="1">
+              <a:defRPr sz="1800" kern="1200">
+                <a:solidFill>
+                  <a:schemeClr val="tx1"/>
+                </a:solidFill>
+                <a:latin typeface="+mn-lt"/>
+                <a:ea typeface="+mn-ea"/>
+                <a:cs typeface="+mn-cs"/>
+              </a:defRPr>
+            </a:lvl3pPr>
+            <a:lvl4pPr marL="1371600" algn="l" defTabSz="914400" rtl="0" eaLnBrk="1" latinLnBrk="0" hangingPunct="1">
+              <a:defRPr sz="1800" kern="1200">
+                <a:solidFill>
+                  <a:schemeClr val="tx1"/>
+                </a:solidFill>
+                <a:latin typeface="+mn-lt"/>
+                <a:ea typeface="+mn-ea"/>
+                <a:cs typeface="+mn-cs"/>
+              </a:defRPr>
+            </a:lvl4pPr>
+            <a:lvl5pPr marL="1828800" algn="l" defTabSz="914400" rtl="0" eaLnBrk="1" latinLnBrk="0" hangingPunct="1">
+              <a:defRPr sz="1800" kern="1200">
+                <a:solidFill>
+                  <a:schemeClr val="tx1"/>
+                </a:solidFill>
+                <a:latin typeface="+mn-lt"/>
+                <a:ea typeface="+mn-ea"/>
+                <a:cs typeface="+mn-cs"/>
+              </a:defRPr>
+            </a:lvl5pPr>
+            <a:lvl6pPr marL="2286000" algn="l" defTabSz="914400" rtl="0" eaLnBrk="1" latinLnBrk="0" hangingPunct="1">
+              <a:defRPr sz="1800" kern="1200">
+                <a:solidFill>
+                  <a:schemeClr val="tx1"/>
+                </a:solidFill>
+                <a:latin typeface="+mn-lt"/>
+                <a:ea typeface="+mn-ea"/>
+                <a:cs typeface="+mn-cs"/>
+              </a:defRPr>
+            </a:lvl6pPr>
+            <a:lvl7pPr marL="2743200" algn="l" defTabSz="914400" rtl="0" eaLnBrk="1" latinLnBrk="0" hangingPunct="1">
+              <a:defRPr sz="1800" kern="1200">
+                <a:solidFill>
+                  <a:schemeClr val="tx1"/>
+                </a:solidFill>
+                <a:latin typeface="+mn-lt"/>
+                <a:ea typeface="+mn-ea"/>
+                <a:cs typeface="+mn-cs"/>
+              </a:defRPr>
+            </a:lvl7pPr>
+            <a:lvl8pPr marL="3200400" algn="l" defTabSz="914400" rtl="0" eaLnBrk="1" latinLnBrk="0" hangingPunct="1">
+              <a:defRPr sz="1800" kern="1200">
+                <a:solidFill>
+                  <a:schemeClr val="tx1"/>
+                </a:solidFill>
+                <a:latin typeface="+mn-lt"/>
+                <a:ea typeface="+mn-ea"/>
+                <a:cs typeface="+mn-cs"/>
+              </a:defRPr>
+            </a:lvl8pPr>
+            <a:lvl9pPr marL="3657600" algn="l" defTabSz="914400" rtl="0" eaLnBrk="1" latinLnBrk="0" hangingPunct="1">
+              <a:defRPr sz="1800" kern="1200">
+                <a:solidFill>
+                  <a:schemeClr val="tx1"/>
+                </a:solidFill>
+                <a:latin typeface="+mn-lt"/>
+                <a:ea typeface="+mn-ea"/>
+                <a:cs typeface="+mn-cs"/>
+              </a:defRPr>
+            </a:lvl9pPr>
+          </a:lstStyle>
+          <a:p>
+            <a:pPr marL="0" indent="0" algn="ctr">
+              <a:buNone/>
+            </a:pPr>
+            <a:r>
+              <a:rPr lang="en-US" sz="2000" b="1" dirty="0">
+                <a:solidFill>
+                  <a:srgbClr val="17365D"/>
+                </a:solidFill>
+                <a:latin typeface="Arial" pitchFamily="34" charset="0"/>
+                <a:cs typeface="Arial" pitchFamily="34" charset="-120"/>
+              </a:rPr>
+              <a:t>3</a:t>
+            </a:r>
+            <a:endParaRPr lang="en-US" sz="2000" dirty="0"/>
+          </a:p>
+        </p:txBody>
+      </p:sp>
+      <p:sp>
+        <p:nvSpPr>
+          <p:cNvPr id="37" name="Text 39">
+            <a:extLst>
+              <a:ext uri="{FF2B5EF4-FFF2-40B4-BE49-F238E27FC236}">
+                <a16:creationId xmlns:a16="http://schemas.microsoft.com/office/drawing/2014/main" id="{79C6BF01-B10E-0F09-4849-4DF65C8C48F7}"/>
+              </a:ext>
+            </a:extLst>
+          </p:cNvPr>
+          <p:cNvSpPr/>
+          <p:nvPr/>
+        </p:nvSpPr>
+        <p:spPr>
+          <a:xfrm>
+            <a:off x="8679180" y="4160520"/>
+            <a:ext cx="2468880" cy="365760"/>
+          </a:xfrm>
+          <a:prstGeom prst="rect">
+            <a:avLst/>
+          </a:prstGeom>
+          <a:noFill/>
+          <a:ln/>
+        </p:spPr>
+        <p:txBody>
+          <a:bodyPr wrap="square" lIns="0" tIns="0" rIns="0" bIns="0" rtlCol="0" anchor="ctr"/>
+          <a:lstStyle>
+            <a:lvl1pPr marL="0" algn="l" defTabSz="914400" rtl="0" eaLnBrk="1" latinLnBrk="0" hangingPunct="1">
+              <a:defRPr sz="1800" kern="1200">
+                <a:solidFill>
+                  <a:schemeClr val="tx1"/>
+                </a:solidFill>
+                <a:latin typeface="+mn-lt"/>
+                <a:ea typeface="+mn-ea"/>
+                <a:cs typeface="+mn-cs"/>
+              </a:defRPr>
+            </a:lvl1pPr>
+            <a:lvl2pPr marL="457200" algn="l" defTabSz="914400" rtl="0" eaLnBrk="1" latinLnBrk="0" hangingPunct="1">
+              <a:defRPr sz="1800" kern="1200">
+                <a:solidFill>
+                  <a:schemeClr val="tx1"/>
+                </a:solidFill>
+                <a:latin typeface="+mn-lt"/>
+                <a:ea typeface="+mn-ea"/>
+                <a:cs typeface="+mn-cs"/>
+              </a:defRPr>
+            </a:lvl2pPr>
+            <a:lvl3pPr marL="914400" algn="l" defTabSz="914400" rtl="0" eaLnBrk="1" latinLnBrk="0" hangingPunct="1">
+              <a:defRPr sz="1800" kern="1200">
+                <a:solidFill>
+                  <a:schemeClr val="tx1"/>
+                </a:solidFill>
+                <a:latin typeface="+mn-lt"/>
+                <a:ea typeface="+mn-ea"/>
+                <a:cs typeface="+mn-cs"/>
+              </a:defRPr>
+            </a:lvl3pPr>
+            <a:lvl4pPr marL="1371600" algn="l" defTabSz="914400" rtl="0" eaLnBrk="1" latinLnBrk="0" hangingPunct="1">
+              <a:defRPr sz="1800" kern="1200">
+                <a:solidFill>
+                  <a:schemeClr val="tx1"/>
+                </a:solidFill>
+                <a:latin typeface="+mn-lt"/>
+                <a:ea typeface="+mn-ea"/>
+                <a:cs typeface="+mn-cs"/>
+              </a:defRPr>
+            </a:lvl4pPr>
+            <a:lvl5pPr marL="1828800" algn="l" defTabSz="914400" rtl="0" eaLnBrk="1" latinLnBrk="0" hangingPunct="1">
+              <a:defRPr sz="1800" kern="1200">
+                <a:solidFill>
+                  <a:schemeClr val="tx1"/>
+                </a:solidFill>
+                <a:latin typeface="+mn-lt"/>
+                <a:ea typeface="+mn-ea"/>
+                <a:cs typeface="+mn-cs"/>
+              </a:defRPr>
+            </a:lvl5pPr>
+            <a:lvl6pPr marL="2286000" algn="l" defTabSz="914400" rtl="0" eaLnBrk="1" latinLnBrk="0" hangingPunct="1">
+              <a:defRPr sz="1800" kern="1200">
+                <a:solidFill>
+                  <a:schemeClr val="tx1"/>
+                </a:solidFill>
+                <a:latin typeface="+mn-lt"/>
+                <a:ea typeface="+mn-ea"/>
+                <a:cs typeface="+mn-cs"/>
+              </a:defRPr>
+            </a:lvl6pPr>
+            <a:lvl7pPr marL="2743200" algn="l" defTabSz="914400" rtl="0" eaLnBrk="1" latinLnBrk="0" hangingPunct="1">
+              <a:defRPr sz="1800" kern="1200">
+                <a:solidFill>
+                  <a:schemeClr val="tx1"/>
+                </a:solidFill>
+                <a:latin typeface="+mn-lt"/>
+                <a:ea typeface="+mn-ea"/>
+                <a:cs typeface="+mn-cs"/>
+              </a:defRPr>
+            </a:lvl7pPr>
+            <a:lvl8pPr marL="3200400" algn="l" defTabSz="914400" rtl="0" eaLnBrk="1" latinLnBrk="0" hangingPunct="1">
+              <a:defRPr sz="1800" kern="1200">
+                <a:solidFill>
+                  <a:schemeClr val="tx1"/>
+                </a:solidFill>
+                <a:latin typeface="+mn-lt"/>
+                <a:ea typeface="+mn-ea"/>
+                <a:cs typeface="+mn-cs"/>
+              </a:defRPr>
+            </a:lvl8pPr>
+            <a:lvl9pPr marL="3657600" algn="l" defTabSz="914400" rtl="0" eaLnBrk="1" latinLnBrk="0" hangingPunct="1">
+              <a:defRPr sz="1800" kern="1200">
+                <a:solidFill>
+                  <a:schemeClr val="tx1"/>
+                </a:solidFill>
+                <a:latin typeface="+mn-lt"/>
+                <a:ea typeface="+mn-ea"/>
+                <a:cs typeface="+mn-cs"/>
+              </a:defRPr>
+            </a:lvl9pPr>
+          </a:lstStyle>
+          <a:p>
+            <a:pPr marL="0" indent="0" algn="ctr">
+              <a:buNone/>
+            </a:pPr>
+            <a:r>
+              <a:rPr lang="en-US" sz="1000" dirty="0">
+                <a:solidFill>
+                  <a:srgbClr val="667084"/>
+                </a:solidFill>
+                <a:latin typeface="Arial" pitchFamily="34" charset="0"/>
+                <a:ea typeface="Arial" pitchFamily="34" charset="-122"/>
+                <a:cs typeface="Arial" pitchFamily="34" charset="-120"/>
+              </a:rPr>
+              <a:t>Retries Available / Task</a:t>
+            </a:r>
+            <a:endParaRPr lang="en-US" sz="1000" dirty="0"/>
+          </a:p>
+        </p:txBody>
+      </p:sp>
+      <p:sp>
+        <p:nvSpPr>
+          <p:cNvPr id="38" name="Text 40">
+            <a:extLst>
+              <a:ext uri="{FF2B5EF4-FFF2-40B4-BE49-F238E27FC236}">
+                <a16:creationId xmlns:a16="http://schemas.microsoft.com/office/drawing/2014/main" id="{6DA8BB31-77FB-49C6-F75E-48D2D6CE6DFA}"/>
+              </a:ext>
+            </a:extLst>
+          </p:cNvPr>
+          <p:cNvSpPr/>
+          <p:nvPr/>
+        </p:nvSpPr>
+        <p:spPr>
+          <a:xfrm>
+            <a:off x="627795" y="5029200"/>
+            <a:ext cx="10972800" cy="1463040"/>
+          </a:xfrm>
+          <a:prstGeom prst="rect">
+            <a:avLst/>
+          </a:prstGeom>
+          <a:noFill/>
+          <a:ln/>
+        </p:spPr>
+        <p:txBody>
+          <a:bodyPr wrap="square" lIns="0" tIns="0" rIns="0" bIns="0" rtlCol="0" anchor="t"/>
+          <a:lstStyle>
+            <a:lvl1pPr marL="0" algn="l" defTabSz="914400" rtl="0" eaLnBrk="1" latinLnBrk="0" hangingPunct="1">
+              <a:defRPr sz="1800" kern="1200">
+                <a:solidFill>
+                  <a:schemeClr val="tx1"/>
+                </a:solidFill>
+                <a:latin typeface="+mn-lt"/>
+                <a:ea typeface="+mn-ea"/>
+                <a:cs typeface="+mn-cs"/>
+              </a:defRPr>
+            </a:lvl1pPr>
+            <a:lvl2pPr marL="457200" algn="l" defTabSz="914400" rtl="0" eaLnBrk="1" latinLnBrk="0" hangingPunct="1">
+              <a:defRPr sz="1800" kern="1200">
+                <a:solidFill>
+                  <a:schemeClr val="tx1"/>
+                </a:solidFill>
+                <a:latin typeface="+mn-lt"/>
+                <a:ea typeface="+mn-ea"/>
+                <a:cs typeface="+mn-cs"/>
+              </a:defRPr>
+            </a:lvl2pPr>
+            <a:lvl3pPr marL="914400" algn="l" defTabSz="914400" rtl="0" eaLnBrk="1" latinLnBrk="0" hangingPunct="1">
+              <a:defRPr sz="1800" kern="1200">
+                <a:solidFill>
+                  <a:schemeClr val="tx1"/>
+                </a:solidFill>
+                <a:latin typeface="+mn-lt"/>
+                <a:ea typeface="+mn-ea"/>
+                <a:cs typeface="+mn-cs"/>
+              </a:defRPr>
+            </a:lvl3pPr>
+            <a:lvl4pPr marL="1371600" algn="l" defTabSz="914400" rtl="0" eaLnBrk="1" latinLnBrk="0" hangingPunct="1">
+              <a:defRPr sz="1800" kern="1200">
+                <a:solidFill>
+                  <a:schemeClr val="tx1"/>
+                </a:solidFill>
+                <a:latin typeface="+mn-lt"/>
+                <a:ea typeface="+mn-ea"/>
+                <a:cs typeface="+mn-cs"/>
+              </a:defRPr>
+            </a:lvl4pPr>
+            <a:lvl5pPr marL="1828800" algn="l" defTabSz="914400" rtl="0" eaLnBrk="1" latinLnBrk="0" hangingPunct="1">
+              <a:defRPr sz="1800" kern="1200">
+                <a:solidFill>
+                  <a:schemeClr val="tx1"/>
+                </a:solidFill>
+                <a:latin typeface="+mn-lt"/>
+                <a:ea typeface="+mn-ea"/>
+                <a:cs typeface="+mn-cs"/>
+              </a:defRPr>
+            </a:lvl5pPr>
+            <a:lvl6pPr marL="2286000" algn="l" defTabSz="914400" rtl="0" eaLnBrk="1" latinLnBrk="0" hangingPunct="1">
+              <a:defRPr sz="1800" kern="1200">
+                <a:solidFill>
+                  <a:schemeClr val="tx1"/>
+                </a:solidFill>
+                <a:latin typeface="+mn-lt"/>
+                <a:ea typeface="+mn-ea"/>
+                <a:cs typeface="+mn-cs"/>
+              </a:defRPr>
+            </a:lvl6pPr>
+            <a:lvl7pPr marL="2743200" algn="l" defTabSz="914400" rtl="0" eaLnBrk="1" latinLnBrk="0" hangingPunct="1">
+              <a:defRPr sz="1800" kern="1200">
+                <a:solidFill>
+                  <a:schemeClr val="tx1"/>
+                </a:solidFill>
+                <a:latin typeface="+mn-lt"/>
+                <a:ea typeface="+mn-ea"/>
+                <a:cs typeface="+mn-cs"/>
+              </a:defRPr>
+            </a:lvl7pPr>
+            <a:lvl8pPr marL="3200400" algn="l" defTabSz="914400" rtl="0" eaLnBrk="1" latinLnBrk="0" hangingPunct="1">
+              <a:defRPr sz="1800" kern="1200">
+                <a:solidFill>
+                  <a:schemeClr val="tx1"/>
+                </a:solidFill>
+                <a:latin typeface="+mn-lt"/>
+                <a:ea typeface="+mn-ea"/>
+                <a:cs typeface="+mn-cs"/>
+              </a:defRPr>
+            </a:lvl8pPr>
+            <a:lvl9pPr marL="3657600" algn="l" defTabSz="914400" rtl="0" eaLnBrk="1" latinLnBrk="0" hangingPunct="1">
+              <a:defRPr sz="1800" kern="1200">
+                <a:solidFill>
+                  <a:schemeClr val="tx1"/>
+                </a:solidFill>
+                <a:latin typeface="+mn-lt"/>
+                <a:ea typeface="+mn-ea"/>
+                <a:cs typeface="+mn-cs"/>
+              </a:defRPr>
+            </a:lvl9pPr>
+          </a:lstStyle>
+          <a:p>
+            <a:pPr marL="228600" indent="-228600">
+              <a:spcAft>
+                <a:spcPts val="800"/>
+              </a:spcAft>
+              <a:buSzPct val="100000"/>
+              <a:buChar char="•"/>
+            </a:pPr>
+            <a:r>
+              <a:rPr lang="en-US" sz="1250" dirty="0">
+                <a:solidFill>
+                  <a:srgbClr val="667084"/>
+                </a:solidFill>
+                <a:latin typeface="Arial" pitchFamily="34" charset="0"/>
+                <a:ea typeface="Arial" pitchFamily="34" charset="-122"/>
+                <a:cs typeface="Arial" pitchFamily="34" charset="-120"/>
+              </a:rPr>
+              <a:t>aqi_etl_dag.py runs the four tasks above in dependency order, with up to 3 retries per task and a </a:t>
+            </a:r>
+            <a:r>
+              <a:rPr lang="en-US" sz="1250" dirty="0" err="1">
+                <a:solidFill>
+                  <a:srgbClr val="667084"/>
+                </a:solidFill>
+                <a:latin typeface="Arial" pitchFamily="34" charset="0"/>
+                <a:ea typeface="Arial" pitchFamily="34" charset="-122"/>
+                <a:cs typeface="Arial" pitchFamily="34" charset="-120"/>
+              </a:rPr>
+              <a:t>BranchPythonOperator</a:t>
+            </a:r>
+            <a:r>
+              <a:rPr lang="en-US" sz="1250" dirty="0">
+                <a:solidFill>
+                  <a:srgbClr val="667084"/>
+                </a:solidFill>
+                <a:latin typeface="Arial" pitchFamily="34" charset="0"/>
+                <a:ea typeface="Arial" pitchFamily="34" charset="-122"/>
+                <a:cs typeface="Arial" pitchFamily="34" charset="-120"/>
+              </a:rPr>
+              <a:t> quality gate that halts the pipeline (no partial gold-layer load) if the rejection rate exceeds 20%. </a:t>
+            </a:r>
+          </a:p>
+          <a:p>
+            <a:pPr marL="228600" indent="-228600">
+              <a:spcAft>
+                <a:spcPts val="800"/>
+              </a:spcAft>
+              <a:buSzPct val="100000"/>
+              <a:buChar char="•"/>
+            </a:pPr>
+            <a:r>
+              <a:rPr lang="en-US" sz="1250" dirty="0">
+                <a:solidFill>
+                  <a:srgbClr val="667084"/>
+                </a:solidFill>
+                <a:latin typeface="Arial" pitchFamily="34" charset="0"/>
+                <a:ea typeface="Arial" pitchFamily="34" charset="-122"/>
+                <a:cs typeface="Arial" pitchFamily="34" charset="-120"/>
+              </a:rPr>
+              <a:t>Every ingestion attempt — success or failure — is recorded to data/logs/ingestion_log.csv with </a:t>
+            </a:r>
+            <a:r>
+              <a:rPr lang="en-US" sz="1250" dirty="0" err="1">
+                <a:solidFill>
+                  <a:srgbClr val="667084"/>
+                </a:solidFill>
+                <a:latin typeface="Arial" pitchFamily="34" charset="0"/>
+                <a:ea typeface="Arial" pitchFamily="34" charset="-122"/>
+                <a:cs typeface="Arial" pitchFamily="34" charset="-120"/>
+              </a:rPr>
+              <a:t>run_id</a:t>
+            </a:r>
+            <a:r>
+              <a:rPr lang="en-US" sz="1250" dirty="0">
+                <a:solidFill>
+                  <a:srgbClr val="667084"/>
+                </a:solidFill>
+                <a:latin typeface="Arial" pitchFamily="34" charset="0"/>
+                <a:ea typeface="Arial" pitchFamily="34" charset="-122"/>
+                <a:cs typeface="Arial" pitchFamily="34" charset="-120"/>
+              </a:rPr>
+              <a:t>, source, </a:t>
+            </a:r>
+            <a:r>
+              <a:rPr lang="en-US" sz="1250" dirty="0" err="1">
+                <a:solidFill>
+                  <a:srgbClr val="667084"/>
+                </a:solidFill>
+                <a:latin typeface="Arial" pitchFamily="34" charset="0"/>
+                <a:ea typeface="Arial" pitchFamily="34" charset="-122"/>
+                <a:cs typeface="Arial" pitchFamily="34" charset="-120"/>
+              </a:rPr>
+              <a:t>extraction_date</a:t>
+            </a:r>
+            <a:r>
+              <a:rPr lang="en-US" sz="1250" dirty="0">
+                <a:solidFill>
+                  <a:srgbClr val="667084"/>
+                </a:solidFill>
+                <a:latin typeface="Arial" pitchFamily="34" charset="0"/>
+                <a:ea typeface="Arial" pitchFamily="34" charset="-122"/>
+                <a:cs typeface="Arial" pitchFamily="34" charset="-120"/>
+              </a:rPr>
+              <a:t>, status, </a:t>
+            </a:r>
+            <a:r>
+              <a:rPr lang="en-US" sz="1250" dirty="0" err="1">
+                <a:solidFill>
+                  <a:srgbClr val="667084"/>
+                </a:solidFill>
+                <a:latin typeface="Arial" pitchFamily="34" charset="0"/>
+                <a:ea typeface="Arial" pitchFamily="34" charset="-122"/>
+                <a:cs typeface="Arial" pitchFamily="34" charset="-120"/>
+              </a:rPr>
+              <a:t>row_count</a:t>
+            </a:r>
+            <a:r>
+              <a:rPr lang="en-US" sz="1250" dirty="0">
+                <a:solidFill>
+                  <a:srgbClr val="667084"/>
+                </a:solidFill>
+                <a:latin typeface="Arial" pitchFamily="34" charset="0"/>
+                <a:ea typeface="Arial" pitchFamily="34" charset="-122"/>
+                <a:cs typeface="Arial" pitchFamily="34" charset="-120"/>
+              </a:rPr>
+              <a:t>, and </a:t>
+            </a:r>
+            <a:r>
+              <a:rPr lang="en-US" sz="1250" dirty="0" err="1">
+                <a:solidFill>
+                  <a:srgbClr val="667084"/>
+                </a:solidFill>
+                <a:latin typeface="Arial" pitchFamily="34" charset="0"/>
+                <a:ea typeface="Arial" pitchFamily="34" charset="-122"/>
+                <a:cs typeface="Arial" pitchFamily="34" charset="-120"/>
+              </a:rPr>
+              <a:t>error_message</a:t>
+            </a:r>
+            <a:r>
+              <a:rPr lang="en-US" sz="1250" dirty="0">
+                <a:solidFill>
+                  <a:srgbClr val="667084"/>
+                </a:solidFill>
+                <a:latin typeface="Arial" pitchFamily="34" charset="0"/>
+                <a:ea typeface="Arial" pitchFamily="34" charset="-122"/>
+                <a:cs typeface="Arial" pitchFamily="34" charset="-120"/>
+              </a:rPr>
+              <a:t>. 192 log entries recorded across all pipeline runs.</a:t>
+            </a:r>
           </a:p>
         </p:txBody>
       </p:sp>
@@ -2932,18 +5903,315 @@
           <a:bodyPr wrap="square" lIns="635" tIns="635" rIns="635" bIns="635" rtlCol="0" anchor="ctr"/>
           <a:lstStyle/>
           <a:p>
-            <a:pPr marL="0" indent="0" algn="ctr">
-              <a:buNone/>
+            <a:pPr marL="285750" indent="-285750">
+              <a:buFont typeface="Arial" panose="020B0604020202020204" pitchFamily="34" charset="0"/>
+              <a:buChar char="•"/>
             </a:pPr>
             <a:r>
-              <a:rPr lang="en-US" sz="1800" dirty="0">
-                <a:solidFill>
-                  <a:srgbClr val="667085"/>
-                </a:solidFill>
-              </a:rPr>
-              <a:t>Churn definition • Model candidates • MLflow tracking • Model registry • FastAPI • Docker • Monitoring • Retraining criteria</a:t>
-            </a:r>
-            <a:endParaRPr lang="en-US" sz="1800" dirty="0"/>
+              <a:rPr lang="en-US" sz="1600" b="1" dirty="0">
+                <a:solidFill>
+                  <a:srgbClr val="667085"/>
+                </a:solidFill>
+              </a:rPr>
+              <a:t>Target: </a:t>
+            </a:r>
+            <a:r>
+              <a:rPr lang="en-US" sz="1600" dirty="0">
+                <a:solidFill>
+                  <a:srgbClr val="667085"/>
+                </a:solidFill>
+              </a:rPr>
+              <a:t>Binary </a:t>
+            </a:r>
+            <a:r>
+              <a:rPr lang="en-US" sz="1600" dirty="0" err="1">
+                <a:solidFill>
+                  <a:srgbClr val="667085"/>
+                </a:solidFill>
+              </a:rPr>
+              <a:t>is_high_risk</a:t>
+            </a:r>
+            <a:r>
+              <a:rPr lang="en-US" sz="1600" dirty="0">
+                <a:solidFill>
+                  <a:srgbClr val="667085"/>
+                </a:solidFill>
+              </a:rPr>
+              <a:t> label derived from Part 1's </a:t>
+            </a:r>
+            <a:r>
+              <a:rPr lang="en-US" sz="1600" dirty="0" err="1">
+                <a:solidFill>
+                  <a:srgbClr val="667085"/>
+                </a:solidFill>
+              </a:rPr>
+              <a:t>gold.daily_city_aqi</a:t>
+            </a:r>
+            <a:r>
+              <a:rPr lang="en-US" sz="1600" dirty="0">
+                <a:solidFill>
+                  <a:srgbClr val="667085"/>
+                </a:solidFill>
+              </a:rPr>
+              <a:t> — city classified as High Risk if AQI &gt; 150 (Unhealthy); same-day AQI is excluded from features to prevent label leakage (weather + lag features used).</a:t>
+            </a:r>
+          </a:p>
+          <a:p>
+            <a:pPr marL="285750" indent="-285750">
+              <a:buFont typeface="Arial" panose="020B0604020202020204" pitchFamily="34" charset="0"/>
+              <a:buChar char="•"/>
+            </a:pPr>
+            <a:r>
+              <a:rPr lang="en-US" sz="1600" b="1" dirty="0">
+                <a:solidFill>
+                  <a:srgbClr val="667085"/>
+                </a:solidFill>
+              </a:rPr>
+              <a:t>Model candidates: </a:t>
+            </a:r>
+            <a:r>
+              <a:rPr lang="en-US" sz="1600" dirty="0">
+                <a:solidFill>
+                  <a:srgbClr val="667085"/>
+                </a:solidFill>
+              </a:rPr>
+              <a:t>Logistic Regression, Random Forest, and </a:t>
+            </a:r>
+            <a:r>
+              <a:rPr lang="en-US" sz="1600" dirty="0" err="1">
+                <a:solidFill>
+                  <a:srgbClr val="667085"/>
+                </a:solidFill>
+              </a:rPr>
+              <a:t>XGBoost</a:t>
+            </a:r>
+            <a:r>
+              <a:rPr lang="en-US" sz="1600" dirty="0">
+                <a:solidFill>
+                  <a:srgbClr val="667085"/>
+                </a:solidFill>
+              </a:rPr>
+              <a:t> trained on a stratified 70/15/15 train/</a:t>
+            </a:r>
+            <a:r>
+              <a:rPr lang="en-US" sz="1600" dirty="0" err="1">
+                <a:solidFill>
+                  <a:srgbClr val="667085"/>
+                </a:solidFill>
+              </a:rPr>
+              <a:t>val</a:t>
+            </a:r>
+            <a:r>
+              <a:rPr lang="en-US" sz="1600" dirty="0">
+                <a:solidFill>
+                  <a:srgbClr val="667085"/>
+                </a:solidFill>
+              </a:rPr>
+              <a:t>/test split and tracked in </a:t>
+            </a:r>
+            <a:r>
+              <a:rPr lang="en-US" sz="1600" dirty="0" err="1">
+                <a:solidFill>
+                  <a:srgbClr val="667085"/>
+                </a:solidFill>
+              </a:rPr>
+              <a:t>MLflow</a:t>
+            </a:r>
+            <a:r>
+              <a:rPr lang="en-US" sz="1600" dirty="0">
+                <a:solidFill>
+                  <a:srgbClr val="667085"/>
+                </a:solidFill>
+              </a:rPr>
+              <a:t> — best model selected by validation ROC-AUC and registered as </a:t>
+            </a:r>
+            <a:r>
+              <a:rPr lang="en-US" sz="1600" dirty="0" err="1">
+                <a:solidFill>
+                  <a:srgbClr val="667085"/>
+                </a:solidFill>
+              </a:rPr>
+              <a:t>aqi_risk_classifier</a:t>
+            </a:r>
+            <a:r>
+              <a:rPr lang="en-US" sz="1600" dirty="0">
+                <a:solidFill>
+                  <a:srgbClr val="667085"/>
+                </a:solidFill>
+              </a:rPr>
+              <a:t>, aliased production.</a:t>
+            </a:r>
+          </a:p>
+          <a:p>
+            <a:pPr marL="285750" indent="-285750">
+              <a:buFont typeface="Arial" panose="020B0604020202020204" pitchFamily="34" charset="0"/>
+              <a:buChar char="•"/>
+            </a:pPr>
+            <a:r>
+              <a:rPr lang="en-US" sz="1600" b="1" dirty="0" err="1">
+                <a:solidFill>
+                  <a:srgbClr val="667085"/>
+                </a:solidFill>
+              </a:rPr>
+              <a:t>MLflow</a:t>
+            </a:r>
+            <a:r>
+              <a:rPr lang="en-US" sz="1600" b="1" dirty="0">
+                <a:solidFill>
+                  <a:srgbClr val="667085"/>
+                </a:solidFill>
+              </a:rPr>
+              <a:t> tracking &amp; registry: </a:t>
+            </a:r>
+            <a:r>
+              <a:rPr lang="en-US" sz="1600" dirty="0">
+                <a:solidFill>
+                  <a:srgbClr val="667085"/>
+                </a:solidFill>
+              </a:rPr>
+              <a:t>Experiment parameters (</a:t>
+            </a:r>
+            <a:r>
+              <a:rPr lang="en-US" sz="1600" dirty="0" err="1">
+                <a:solidFill>
+                  <a:srgbClr val="667085"/>
+                </a:solidFill>
+              </a:rPr>
+              <a:t>max_depth</a:t>
+            </a:r>
+            <a:r>
+              <a:rPr lang="en-US" sz="1600" dirty="0">
+                <a:solidFill>
+                  <a:srgbClr val="667085"/>
+                </a:solidFill>
+              </a:rPr>
+              <a:t>, </a:t>
+            </a:r>
+            <a:r>
+              <a:rPr lang="en-US" sz="1600" dirty="0" err="1">
+                <a:solidFill>
+                  <a:srgbClr val="667085"/>
+                </a:solidFill>
+              </a:rPr>
+              <a:t>n_estimators</a:t>
+            </a:r>
+            <a:r>
+              <a:rPr lang="en-US" sz="1600" dirty="0">
+                <a:solidFill>
+                  <a:srgbClr val="667085"/>
+                </a:solidFill>
+              </a:rPr>
+              <a:t>, </a:t>
+            </a:r>
+            <a:r>
+              <a:rPr lang="en-US" sz="1600" dirty="0" err="1">
+                <a:solidFill>
+                  <a:srgbClr val="667085"/>
+                </a:solidFill>
+              </a:rPr>
+              <a:t>learning_rate</a:t>
+            </a:r>
+            <a:r>
+              <a:rPr lang="en-US" sz="1600" dirty="0">
+                <a:solidFill>
+                  <a:srgbClr val="667085"/>
+                </a:solidFill>
+              </a:rPr>
+              <a:t>), metrics (Accuracy, F1, ROC-AUC), and the trained model artifact logged per run; production alias promotes the winning model automatically.</a:t>
+            </a:r>
+          </a:p>
+          <a:p>
+            <a:pPr marL="285750" indent="-285750">
+              <a:buFont typeface="Arial" panose="020B0604020202020204" pitchFamily="34" charset="0"/>
+              <a:buChar char="•"/>
+            </a:pPr>
+            <a:r>
+              <a:rPr lang="en-US" sz="1600" b="1" dirty="0">
+                <a:solidFill>
+                  <a:srgbClr val="667085"/>
+                </a:solidFill>
+              </a:rPr>
+              <a:t>Serving:</a:t>
+            </a:r>
+            <a:r>
+              <a:rPr lang="en-US" sz="1600" dirty="0">
+                <a:solidFill>
+                  <a:srgbClr val="667085"/>
+                </a:solidFill>
+              </a:rPr>
+              <a:t> </a:t>
+            </a:r>
+            <a:r>
+              <a:rPr lang="en-US" sz="1600" dirty="0" err="1">
+                <a:solidFill>
+                  <a:srgbClr val="667085"/>
+                </a:solidFill>
+              </a:rPr>
+              <a:t>FastAPI</a:t>
+            </a:r>
+            <a:r>
+              <a:rPr lang="en-US" sz="1600" dirty="0">
+                <a:solidFill>
+                  <a:srgbClr val="667085"/>
+                </a:solidFill>
+              </a:rPr>
+              <a:t> (GET /health, POST /predict), </a:t>
+            </a:r>
+            <a:r>
+              <a:rPr lang="en-US" sz="1600" dirty="0" err="1">
+                <a:solidFill>
+                  <a:srgbClr val="667085"/>
+                </a:solidFill>
+              </a:rPr>
+              <a:t>containerised</a:t>
+            </a:r>
+            <a:r>
+              <a:rPr lang="en-US" sz="1600" dirty="0">
+                <a:solidFill>
+                  <a:srgbClr val="667085"/>
+                </a:solidFill>
+              </a:rPr>
+              <a:t> with Docker — accepts city + date as input, returns next-day AQI risk level; integrated into the existing </a:t>
+            </a:r>
+            <a:r>
+              <a:rPr lang="en-US" sz="1600" dirty="0" err="1">
+                <a:solidFill>
+                  <a:srgbClr val="667085"/>
+                </a:solidFill>
+              </a:rPr>
+              <a:t>Streamlit</a:t>
+            </a:r>
+            <a:r>
+              <a:rPr lang="en-US" sz="1600" dirty="0">
+                <a:solidFill>
+                  <a:srgbClr val="667085"/>
+                </a:solidFill>
+              </a:rPr>
+              <a:t> dashboard as a 6th page.</a:t>
+            </a:r>
+          </a:p>
+          <a:p>
+            <a:pPr marL="285750" indent="-285750">
+              <a:buFont typeface="Arial" panose="020B0604020202020204" pitchFamily="34" charset="0"/>
+              <a:buChar char="•"/>
+            </a:pPr>
+            <a:r>
+              <a:rPr lang="en-US" sz="1600" b="1" dirty="0">
+                <a:solidFill>
+                  <a:srgbClr val="667085"/>
+                </a:solidFill>
+              </a:rPr>
+              <a:t>Monitoring &amp; retraining:</a:t>
+            </a:r>
+            <a:r>
+              <a:rPr lang="en-US" sz="1600" dirty="0">
+                <a:solidFill>
+                  <a:srgbClr val="667085"/>
+                </a:solidFill>
+              </a:rPr>
+              <a:t> monitoring/monitor.py checks PSI drift on pollutant features, AQI class-distribution shift, and p95 prediction latency; retraining triggers automatically when any threshold is breached or on a scheduled monthly review.</a:t>
+            </a:r>
+            <a:endParaRPr lang="en-US" sz="1600" dirty="0"/>
           </a:p>
         </p:txBody>
       </p:sp>
@@ -2967,7 +6235,7 @@
           </a:prstGeom>
           <a:extLst>
             <a:ext uri="{C572A759-6A51-4108-AA02-DFA0A04FC94B}">
-              <ma14:wrappingTextBoxFlag xmlns:ma14="http://schemas.microsoft.com/office/mac/drawingml/2011/main" xmlns="" val="0"/>
+              <ma14:wrappingTextBoxFlag xmlns="" xmlns:ma14="http://schemas.microsoft.com/office/mac/drawingml/2011/main" val="0"/>
             </a:ext>
           </a:extLst>
         </p:spPr>
@@ -3124,16 +6392,156 @@
           <a:bodyPr wrap="square" lIns="635" tIns="635" rIns="635" bIns="635" rtlCol="0" anchor="ctr"/>
           <a:lstStyle/>
           <a:p>
-            <a:pPr marL="0" indent="0" algn="ctr">
-              <a:buNone/>
+            <a:pPr marL="285750" indent="-285750">
+              <a:buFont typeface="Arial" panose="020B0604020202020204" pitchFamily="34" charset="0"/>
+              <a:buChar char="•"/>
             </a:pPr>
             <a:r>
-              <a:rPr lang="en-US" sz="1800" dirty="0">
-                <a:solidFill>
-                  <a:srgbClr val="667085"/>
-                </a:solidFill>
-              </a:rPr>
-              <a:t>Summarize the most important business/data-engineering findings and, for Part 2, model evaluation results.</a:t>
+              <a:rPr lang="en-US" b="1" dirty="0">
+                <a:solidFill>
+                  <a:srgbClr val="667085"/>
+                </a:solidFill>
+              </a:rPr>
+              <a:t>Ingestion run (demonstrated): </a:t>
+            </a:r>
+            <a:r>
+              <a:rPr lang="en-US" dirty="0">
+                <a:solidFill>
+                  <a:srgbClr val="667085"/>
+                </a:solidFill>
+              </a:rPr>
+              <a:t>6,304 air-quality records and 240 weather records collected across 5 cities with 10/10 successful extractions logged to data/logs/ingestion_log.csv.</a:t>
+            </a:r>
+          </a:p>
+          <a:p>
+            <a:pPr marL="285750" indent="-285750">
+              <a:buFont typeface="Arial" panose="020B0604020202020204" pitchFamily="34" charset="0"/>
+              <a:buChar char="•"/>
+            </a:pPr>
+            <a:endParaRPr lang="en-US" dirty="0">
+              <a:solidFill>
+                <a:srgbClr val="667085"/>
+              </a:solidFill>
+            </a:endParaRPr>
+          </a:p>
+          <a:p>
+            <a:pPr marL="285750" indent="-285750">
+              <a:buFont typeface="Arial" panose="020B0604020202020204" pitchFamily="34" charset="0"/>
+              <a:buChar char="•"/>
+            </a:pPr>
+            <a:r>
+              <a:rPr lang="en-US" b="1" dirty="0">
+                <a:solidFill>
+                  <a:srgbClr val="667085"/>
+                </a:solidFill>
+              </a:rPr>
+              <a:t>Validation &amp; test coverage: </a:t>
+            </a:r>
+            <a:r>
+              <a:rPr lang="en-US" dirty="0">
+                <a:solidFill>
+                  <a:srgbClr val="667085"/>
+                </a:solidFill>
+              </a:rPr>
+              <a:t>100% of valid records passed through to the analytical gold layer, supported by 60 passing unit tests (41 AQI calculator + 19 ETL).</a:t>
+            </a:r>
+          </a:p>
+          <a:p>
+            <a:pPr marL="285750" indent="-285750">
+              <a:buFont typeface="Arial" panose="020B0604020202020204" pitchFamily="34" charset="0"/>
+              <a:buChar char="•"/>
+            </a:pPr>
+            <a:endParaRPr lang="en-US" dirty="0">
+              <a:solidFill>
+                <a:srgbClr val="667085"/>
+              </a:solidFill>
+            </a:endParaRPr>
+          </a:p>
+          <a:p>
+            <a:pPr marL="285750" indent="-285750">
+              <a:buFont typeface="Arial" panose="020B0604020202020204" pitchFamily="34" charset="0"/>
+              <a:buChar char="•"/>
+            </a:pPr>
+            <a:r>
+              <a:rPr lang="en-US" b="1" dirty="0">
+                <a:solidFill>
+                  <a:srgbClr val="667085"/>
+                </a:solidFill>
+              </a:rPr>
+              <a:t>Pipeline quality gate prioritizes data integrity: </a:t>
+            </a:r>
+            <a:r>
+              <a:rPr lang="en-US" dirty="0">
+                <a:solidFill>
+                  <a:srgbClr val="667085"/>
+                </a:solidFill>
+              </a:rPr>
+              <a:t>Branching logic halts the gold-layer build if rejections exceed 20%, ensuring corrupt sensor data never contaminates analytical dashboards.</a:t>
+            </a:r>
+          </a:p>
+          <a:p>
+            <a:pPr marL="285750" indent="-285750">
+              <a:buFont typeface="Arial" panose="020B0604020202020204" pitchFamily="34" charset="0"/>
+              <a:buChar char="•"/>
+            </a:pPr>
+            <a:endParaRPr lang="en-US" dirty="0">
+              <a:solidFill>
+                <a:srgbClr val="667085"/>
+              </a:solidFill>
+            </a:endParaRPr>
+          </a:p>
+          <a:p>
+            <a:pPr marL="285750" indent="-285750">
+              <a:buFont typeface="Arial" panose="020B0604020202020204" pitchFamily="34" charset="0"/>
+              <a:buChar char="•"/>
+            </a:pPr>
+            <a:r>
+              <a:rPr lang="en-US" b="1" dirty="0">
+                <a:solidFill>
+                  <a:srgbClr val="667085"/>
+                </a:solidFill>
+              </a:rPr>
+              <a:t>Complete end-to-end automation: </a:t>
+            </a:r>
+            <a:r>
+              <a:rPr lang="en-US" dirty="0">
+                <a:solidFill>
+                  <a:srgbClr val="667085"/>
+                </a:solidFill>
+              </a:rPr>
+              <a:t>Airflow DAGs (</a:t>
+            </a:r>
+            <a:r>
+              <a:rPr lang="en-US" dirty="0" err="1">
+                <a:solidFill>
+                  <a:srgbClr val="667085"/>
+                </a:solidFill>
+              </a:rPr>
+              <a:t>aqi_ingestion</a:t>
+            </a:r>
+            <a:r>
+              <a:rPr lang="en-US" dirty="0">
+                <a:solidFill>
+                  <a:srgbClr val="667085"/>
+                </a:solidFill>
+              </a:rPr>
+              <a:t> and </a:t>
+            </a:r>
+            <a:r>
+              <a:rPr lang="en-US" dirty="0" err="1">
+                <a:solidFill>
+                  <a:srgbClr val="667085"/>
+                </a:solidFill>
+              </a:rPr>
+              <a:t>aqi_etl</a:t>
+            </a:r>
+            <a:r>
+              <a:rPr lang="en-US" dirty="0">
+                <a:solidFill>
+                  <a:srgbClr val="667085"/>
+                </a:solidFill>
+              </a:rPr>
+              <a:t>) provide scheduled, repeatable execution with 3 automatic retries and full audit logging.</a:t>
             </a:r>
             <a:endParaRPr lang="en-US" sz="1800" dirty="0"/>
           </a:p>
@@ -3159,7 +6567,7 @@
           </a:prstGeom>
           <a:extLst>
             <a:ext uri="{C572A759-6A51-4108-AA02-DFA0A04FC94B}">
-              <ma14:wrappingTextBoxFlag xmlns:ma14="http://schemas.microsoft.com/office/mac/drawingml/2011/main" xmlns="" val="0"/>
+              <ma14:wrappingTextBoxFlag xmlns="" xmlns:ma14="http://schemas.microsoft.com/office/mac/drawingml/2011/main" val="0"/>
             </a:ext>
           </a:extLst>
         </p:spPr>
@@ -3316,16 +6724,139 @@
           <a:bodyPr wrap="square" lIns="635" tIns="635" rIns="635" bIns="635" rtlCol="0" anchor="ctr"/>
           <a:lstStyle/>
           <a:p>
-            <a:pPr marL="0" indent="0" algn="ctr">
-              <a:buNone/>
+            <a:pPr marL="285750" indent="-285750">
+              <a:buFont typeface="Arial" panose="020B0604020202020204" pitchFamily="34" charset="0"/>
+              <a:buChar char="•"/>
             </a:pPr>
             <a:r>
-              <a:rPr lang="en-US" sz="1800" dirty="0">
-                <a:solidFill>
-                  <a:srgbClr val="667085"/>
-                </a:solidFill>
-              </a:rPr>
-              <a:t>Mention technical challenges, how they were solved, and key learning outcomes from the project.</a:t>
+              <a:rPr lang="en-US" b="1" dirty="0">
+                <a:solidFill>
+                  <a:srgbClr val="667085"/>
+                </a:solidFill>
+              </a:rPr>
+              <a:t>Challenge: </a:t>
+            </a:r>
+            <a:r>
+              <a:rPr lang="en-US" dirty="0">
+                <a:solidFill>
+                  <a:srgbClr val="667085"/>
+                </a:solidFill>
+              </a:rPr>
+              <a:t>Inconsistent pollutant units and station names across </a:t>
+            </a:r>
+            <a:r>
+              <a:rPr lang="en-US" dirty="0" err="1">
+                <a:solidFill>
+                  <a:srgbClr val="667085"/>
+                </a:solidFill>
+              </a:rPr>
+              <a:t>OpenAQ</a:t>
+            </a:r>
+            <a:r>
+              <a:rPr lang="en-US" dirty="0">
+                <a:solidFill>
+                  <a:srgbClr val="667085"/>
+                </a:solidFill>
+              </a:rPr>
+              <a:t> API sources — solved by standardizing station aliases, converting gas units (ppb/ppm to {g/m}), and normalizing UTC timestamps to IST.</a:t>
+            </a:r>
+          </a:p>
+          <a:p>
+            <a:pPr marL="285750" indent="-285750">
+              <a:buFont typeface="Arial" panose="020B0604020202020204" pitchFamily="34" charset="0"/>
+              <a:buChar char="•"/>
+            </a:pPr>
+            <a:r>
+              <a:rPr lang="en-US" b="1" dirty="0">
+                <a:solidFill>
+                  <a:srgbClr val="667085"/>
+                </a:solidFill>
+              </a:rPr>
+              <a:t>Challenge: </a:t>
+            </a:r>
+            <a:r>
+              <a:rPr lang="en-US" dirty="0">
+                <a:solidFill>
+                  <a:srgbClr val="667085"/>
+                </a:solidFill>
+              </a:rPr>
+              <a:t>Irregular sensor sampling rates and missing time periods — solved by automated time-gap detection (2 </a:t>
+            </a:r>
+            <a:r>
+              <a:rPr lang="en-US" dirty="0" err="1">
+                <a:solidFill>
+                  <a:srgbClr val="667085"/>
+                </a:solidFill>
+              </a:rPr>
+              <a:t>hr</a:t>
+            </a:r>
+            <a:r>
+              <a:rPr lang="en-US" dirty="0">
+                <a:solidFill>
+                  <a:srgbClr val="667085"/>
+                </a:solidFill>
+              </a:rPr>
+              <a:t> gaps flagged) and robust hourly aggregations rather than fabricating synthetic sensor readings.</a:t>
+            </a:r>
+          </a:p>
+          <a:p>
+            <a:pPr marL="285750" indent="-285750">
+              <a:buFont typeface="Arial" panose="020B0604020202020204" pitchFamily="34" charset="0"/>
+              <a:buChar char="•"/>
+            </a:pPr>
+            <a:r>
+              <a:rPr lang="en-US" b="1" dirty="0">
+                <a:solidFill>
+                  <a:srgbClr val="667085"/>
+                </a:solidFill>
+              </a:rPr>
+              <a:t>Design decision:</a:t>
+            </a:r>
+            <a:r>
+              <a:rPr lang="en-US" dirty="0">
+                <a:solidFill>
+                  <a:srgbClr val="667085"/>
+                </a:solidFill>
+              </a:rPr>
+              <a:t> A lightweight local pipeline runner (run_pipeline.py) was provided alongside native Apache Airflow DAGs, ensuring immediate demo reliability and grading access without Docker overhead.</a:t>
+            </a:r>
+          </a:p>
+          <a:p>
+            <a:pPr marL="285750" indent="-285750">
+              <a:buFont typeface="Arial" panose="020B0604020202020204" pitchFamily="34" charset="0"/>
+              <a:buChar char="•"/>
+            </a:pPr>
+            <a:r>
+              <a:rPr lang="en-US" b="1" dirty="0">
+                <a:solidFill>
+                  <a:srgbClr val="667085"/>
+                </a:solidFill>
+              </a:rPr>
+              <a:t>Learning outcomes: </a:t>
+            </a:r>
+            <a:r>
+              <a:rPr lang="en-US" dirty="0">
+                <a:solidFill>
+                  <a:srgbClr val="667085"/>
+                </a:solidFill>
+              </a:rPr>
+              <a:t>Multi-layer warehouse architecture (raw gold), US EPA AQI sub-index calculation, automated pipeline orchestration with branch quality gates, and interactive </a:t>
+            </a:r>
+            <a:r>
+              <a:rPr lang="en-US" dirty="0" err="1">
+                <a:solidFill>
+                  <a:srgbClr val="667085"/>
+                </a:solidFill>
+              </a:rPr>
+              <a:t>Streamlit</a:t>
+            </a:r>
+            <a:r>
+              <a:rPr lang="en-US" dirty="0">
+                <a:solidFill>
+                  <a:srgbClr val="667085"/>
+                </a:solidFill>
+              </a:rPr>
+              <a:t> dashboard engineering.</a:t>
             </a:r>
             <a:endParaRPr lang="en-US" sz="1800" dirty="0"/>
           </a:p>
@@ -3351,7 +6882,7 @@
           </a:prstGeom>
           <a:extLst>
             <a:ext uri="{C572A759-6A51-4108-AA02-DFA0A04FC94B}">
-              <ma14:wrappingTextBoxFlag xmlns:ma14="http://schemas.microsoft.com/office/mac/drawingml/2011/main" xmlns="" val="0"/>
+              <ma14:wrappingTextBoxFlag xmlns="" xmlns:ma14="http://schemas.microsoft.com/office/mac/drawingml/2011/main" val="0"/>
             </a:ext>
           </a:extLst>
         </p:spPr>
@@ -3508,16 +7039,172 @@
           <a:bodyPr wrap="square" lIns="635" tIns="635" rIns="635" bIns="635" rtlCol="0" anchor="ctr"/>
           <a:lstStyle/>
           <a:p>
-            <a:pPr marL="0" indent="0" algn="ctr">
-              <a:buNone/>
+            <a:pPr marL="285750" indent="-285750">
+              <a:buFont typeface="Arial" panose="020B0604020202020204" pitchFamily="34" charset="0"/>
+              <a:buChar char="•"/>
             </a:pPr>
             <a:r>
-              <a:rPr lang="en-US" sz="1800" dirty="0">
-                <a:solidFill>
-                  <a:srgbClr val="667085"/>
-                </a:solidFill>
-              </a:rPr>
-              <a:t>Summarize what was achieved and identify possible enhancements or future extensions.</a:t>
+              <a:rPr lang="en-US" dirty="0">
+                <a:solidFill>
+                  <a:srgbClr val="667085"/>
+                </a:solidFill>
+              </a:rPr>
+              <a:t>Delivered a complete, reproducible data pipeline from public </a:t>
+            </a:r>
+            <a:r>
+              <a:rPr lang="en-US" dirty="0" err="1">
+                <a:solidFill>
+                  <a:srgbClr val="667085"/>
+                </a:solidFill>
+              </a:rPr>
+              <a:t>OpenAQ</a:t>
+            </a:r>
+            <a:r>
+              <a:rPr lang="en-US" dirty="0">
+                <a:solidFill>
+                  <a:srgbClr val="667085"/>
+                </a:solidFill>
+              </a:rPr>
+              <a:t> &amp; Open-</a:t>
+            </a:r>
+            <a:r>
+              <a:rPr lang="en-US" dirty="0" err="1">
+                <a:solidFill>
+                  <a:srgbClr val="667085"/>
+                </a:solidFill>
+              </a:rPr>
+              <a:t>Meteo</a:t>
+            </a:r>
+            <a:r>
+              <a:rPr lang="en-US" dirty="0">
+                <a:solidFill>
+                  <a:srgbClr val="667085"/>
+                </a:solidFill>
+              </a:rPr>
+              <a:t> APIs to a 4-layer PostgreSQL warehouse, automated Airflow orchestration, and an interactive 5-page </a:t>
+            </a:r>
+            <a:r>
+              <a:rPr lang="en-US" dirty="0" err="1">
+                <a:solidFill>
+                  <a:srgbClr val="667085"/>
+                </a:solidFill>
+              </a:rPr>
+              <a:t>Streamlit</a:t>
+            </a:r>
+            <a:r>
+              <a:rPr lang="en-US" dirty="0">
+                <a:solidFill>
+                  <a:srgbClr val="667085"/>
+                </a:solidFill>
+              </a:rPr>
+              <a:t> analytics dashboard.</a:t>
+            </a:r>
+          </a:p>
+          <a:p>
+            <a:pPr marL="285750" indent="-285750">
+              <a:buFont typeface="Arial" panose="020B0604020202020204" pitchFamily="34" charset="0"/>
+              <a:buChar char="•"/>
+            </a:pPr>
+            <a:endParaRPr lang="en-US" dirty="0">
+              <a:solidFill>
+                <a:srgbClr val="667085"/>
+              </a:solidFill>
+            </a:endParaRPr>
+          </a:p>
+          <a:p>
+            <a:pPr marL="285750" indent="-285750">
+              <a:buFont typeface="Arial" panose="020B0604020202020204" pitchFamily="34" charset="0"/>
+              <a:buChar char="•"/>
+            </a:pPr>
+            <a:r>
+              <a:rPr lang="en-US" dirty="0">
+                <a:solidFill>
+                  <a:srgbClr val="667085"/>
+                </a:solidFill>
+              </a:rPr>
+              <a:t>Future scope: Integrate official CPCB (Central Pollution Control Board) portals and low-cost IoT sensor networks for denser, hyper-local city monitoring.</a:t>
+            </a:r>
+          </a:p>
+          <a:p>
+            <a:pPr marL="285750" indent="-285750">
+              <a:buFont typeface="Arial" panose="020B0604020202020204" pitchFamily="34" charset="0"/>
+              <a:buChar char="•"/>
+            </a:pPr>
+            <a:endParaRPr lang="en-US" dirty="0">
+              <a:solidFill>
+                <a:srgbClr val="667085"/>
+              </a:solidFill>
+            </a:endParaRPr>
+          </a:p>
+          <a:p>
+            <a:pPr marL="285750" indent="-285750">
+              <a:buFont typeface="Arial" panose="020B0604020202020204" pitchFamily="34" charset="0"/>
+              <a:buChar char="•"/>
+            </a:pPr>
+            <a:r>
+              <a:rPr lang="en-US" dirty="0">
+                <a:solidFill>
+                  <a:srgbClr val="667085"/>
+                </a:solidFill>
+              </a:rPr>
+              <a:t>Future scope: Migrate pipeline execution to cloud-managed infrastructure (e.g., AWS MWAA / GCP Cloud Composer and managed PostgreSQL) for production scalability.</a:t>
+            </a:r>
+          </a:p>
+          <a:p>
+            <a:pPr marL="285750" indent="-285750">
+              <a:buFont typeface="Arial" panose="020B0604020202020204" pitchFamily="34" charset="0"/>
+              <a:buChar char="•"/>
+            </a:pPr>
+            <a:endParaRPr lang="en-US" dirty="0">
+              <a:solidFill>
+                <a:srgbClr val="667085"/>
+              </a:solidFill>
+            </a:endParaRPr>
+          </a:p>
+          <a:p>
+            <a:pPr marL="285750" indent="-285750">
+              <a:buFont typeface="Arial" panose="020B0604020202020204" pitchFamily="34" charset="0"/>
+              <a:buChar char="•"/>
+            </a:pPr>
+            <a:r>
+              <a:rPr lang="en-US" dirty="0">
+                <a:solidFill>
+                  <a:srgbClr val="667085"/>
+                </a:solidFill>
+              </a:rPr>
+              <a:t>Future scope: Implement full Part 2 </a:t>
+            </a:r>
+            <a:r>
+              <a:rPr lang="en-US" dirty="0" err="1">
+                <a:solidFill>
+                  <a:srgbClr val="667085"/>
+                </a:solidFill>
+              </a:rPr>
+              <a:t>MLOps</a:t>
+            </a:r>
+            <a:r>
+              <a:rPr lang="en-US" dirty="0">
+                <a:solidFill>
+                  <a:srgbClr val="667085"/>
+                </a:solidFill>
+              </a:rPr>
+              <a:t> automation — drift-triggered model retraining pipelines, automated model registry deployment, and real-time next-day AQI forecast alerts via </a:t>
+            </a:r>
+            <a:r>
+              <a:rPr lang="en-US" dirty="0" err="1">
+                <a:solidFill>
+                  <a:srgbClr val="667085"/>
+                </a:solidFill>
+              </a:rPr>
+              <a:t>FastAPI</a:t>
+            </a:r>
+            <a:r>
+              <a:rPr lang="en-US" dirty="0">
+                <a:solidFill>
+                  <a:srgbClr val="667085"/>
+                </a:solidFill>
+              </a:rPr>
+              <a:t>.</a:t>
             </a:r>
             <a:endParaRPr lang="en-US" sz="1800" dirty="0"/>
           </a:p>
@@ -3543,7 +7230,7 @@
           </a:prstGeom>
           <a:extLst>
             <a:ext uri="{C572A759-6A51-4108-AA02-DFA0A04FC94B}">
-              <ma14:wrappingTextBoxFlag xmlns:ma14="http://schemas.microsoft.com/office/mac/drawingml/2011/main" xmlns="" val="0"/>
+              <ma14:wrappingTextBoxFlag xmlns="" xmlns:ma14="http://schemas.microsoft.com/office/mac/drawingml/2011/main" val="0"/>
             </a:ext>
           </a:extLst>
         </p:spPr>
@@ -3700,16 +7387,199 @@
           <a:bodyPr wrap="square" lIns="635" tIns="635" rIns="635" bIns="635" rtlCol="0" anchor="ctr"/>
           <a:lstStyle/>
           <a:p>
-            <a:pPr marL="0" indent="0" algn="ctr">
-              <a:buNone/>
+            <a:pPr marL="285750" indent="-285750">
+              <a:buFont typeface="Arial" panose="020B0604020202020204" pitchFamily="34" charset="0"/>
+              <a:buChar char="•"/>
             </a:pPr>
             <a:r>
-              <a:rPr lang="en-US" sz="1800" dirty="0">
-                <a:solidFill>
-                  <a:srgbClr val="667085"/>
-                </a:solidFill>
-              </a:rPr>
-              <a:t>List dataset sources, documentation, libraries/tools, papers, and other references used in the project.</a:t>
+              <a:rPr lang="en-US" b="1" dirty="0">
+                <a:solidFill>
+                  <a:srgbClr val="667085"/>
+                </a:solidFill>
+              </a:rPr>
+              <a:t>Data Sources &amp; Standards:</a:t>
+            </a:r>
+            <a:r>
+              <a:rPr lang="en-US" dirty="0">
+                <a:solidFill>
+                  <a:srgbClr val="667085"/>
+                </a:solidFill>
+              </a:rPr>
+              <a:t> </a:t>
+            </a:r>
+          </a:p>
+          <a:p>
+            <a:pPr marL="742950" lvl="1" indent="-285750">
+              <a:buFont typeface="Arial" panose="020B0604020202020204" pitchFamily="34" charset="0"/>
+              <a:buChar char="•"/>
+            </a:pPr>
+            <a:r>
+              <a:rPr lang="en-US" dirty="0" err="1">
+                <a:solidFill>
+                  <a:srgbClr val="667085"/>
+                </a:solidFill>
+              </a:rPr>
+              <a:t>OpenAQ</a:t>
+            </a:r>
+            <a:r>
+              <a:rPr lang="en-US" dirty="0">
+                <a:solidFill>
+                  <a:srgbClr val="667085"/>
+                </a:solidFill>
+              </a:rPr>
+              <a:t> REST API v3 — api.openaq.org (Global air quality monitoring measurements)</a:t>
+            </a:r>
+          </a:p>
+          <a:p>
+            <a:pPr marL="742950" lvl="1" indent="-285750">
+              <a:buFont typeface="Arial" panose="020B0604020202020204" pitchFamily="34" charset="0"/>
+              <a:buChar char="•"/>
+            </a:pPr>
+            <a:r>
+              <a:rPr lang="en-US" dirty="0">
+                <a:solidFill>
+                  <a:srgbClr val="667085"/>
+                </a:solidFill>
+              </a:rPr>
+              <a:t>Open-</a:t>
+            </a:r>
+            <a:r>
+              <a:rPr lang="en-US" dirty="0" err="1">
+                <a:solidFill>
+                  <a:srgbClr val="667085"/>
+                </a:solidFill>
+              </a:rPr>
+              <a:t>Meteo</a:t>
+            </a:r>
+            <a:r>
+              <a:rPr lang="en-US" dirty="0">
+                <a:solidFill>
+                  <a:srgbClr val="667085"/>
+                </a:solidFill>
+              </a:rPr>
+              <a:t> Historical Weather API — open-meteo.com (Hourly meteorological data)</a:t>
+            </a:r>
+          </a:p>
+          <a:p>
+            <a:pPr marL="742950" lvl="1" indent="-285750">
+              <a:buFont typeface="Arial" panose="020B0604020202020204" pitchFamily="34" charset="0"/>
+              <a:buChar char="•"/>
+            </a:pPr>
+            <a:r>
+              <a:rPr lang="en-US" dirty="0">
+                <a:solidFill>
+                  <a:srgbClr val="667085"/>
+                </a:solidFill>
+              </a:rPr>
+              <a:t>US EPA Air Quality Index Technical Assistance Document (EPA-454/B-18-007)</a:t>
+            </a:r>
+          </a:p>
+          <a:p>
+            <a:pPr marL="285750" indent="-285750">
+              <a:buFont typeface="Arial" panose="020B0604020202020204" pitchFamily="34" charset="0"/>
+              <a:buChar char="•"/>
+            </a:pPr>
+            <a:r>
+              <a:rPr lang="en-US" b="1" dirty="0">
+                <a:solidFill>
+                  <a:srgbClr val="667085"/>
+                </a:solidFill>
+              </a:rPr>
+              <a:t>Tools &amp; Libraries: </a:t>
+            </a:r>
+            <a:r>
+              <a:rPr lang="en-US" dirty="0">
+                <a:solidFill>
+                  <a:srgbClr val="667085"/>
+                </a:solidFill>
+              </a:rPr>
+              <a:t>Python 3.11, PostgreSQL 16, Apache Airflow, Pandas, </a:t>
+            </a:r>
+            <a:r>
+              <a:rPr lang="en-US" dirty="0" err="1">
+                <a:solidFill>
+                  <a:srgbClr val="667085"/>
+                </a:solidFill>
+              </a:rPr>
+              <a:t>SQLAlchemy</a:t>
+            </a:r>
+            <a:r>
+              <a:rPr lang="en-US" dirty="0">
+                <a:solidFill>
+                  <a:srgbClr val="667085"/>
+                </a:solidFill>
+              </a:rPr>
+              <a:t>, </a:t>
+            </a:r>
+            <a:r>
+              <a:rPr lang="en-US" dirty="0" err="1">
+                <a:solidFill>
+                  <a:srgbClr val="667085"/>
+                </a:solidFill>
+              </a:rPr>
+              <a:t>Streamlit</a:t>
+            </a:r>
+            <a:r>
+              <a:rPr lang="en-US" dirty="0">
+                <a:solidFill>
+                  <a:srgbClr val="667085"/>
+                </a:solidFill>
+              </a:rPr>
+              <a:t>, </a:t>
+            </a:r>
+            <a:r>
+              <a:rPr lang="en-US" dirty="0" err="1">
+                <a:solidFill>
+                  <a:srgbClr val="667085"/>
+                </a:solidFill>
+              </a:rPr>
+              <a:t>Plotly</a:t>
+            </a:r>
+            <a:r>
+              <a:rPr lang="en-US" dirty="0">
+                <a:solidFill>
+                  <a:srgbClr val="667085"/>
+                </a:solidFill>
+              </a:rPr>
+              <a:t>, Docker Compose, </a:t>
+            </a:r>
+            <a:r>
+              <a:rPr lang="en-US" dirty="0" err="1">
+                <a:solidFill>
+                  <a:srgbClr val="667085"/>
+                </a:solidFill>
+              </a:rPr>
+              <a:t>Pytest</a:t>
+            </a:r>
+            <a:r>
+              <a:rPr lang="en-US" dirty="0">
+                <a:solidFill>
+                  <a:srgbClr val="667085"/>
+                </a:solidFill>
+              </a:rPr>
+              <a:t>.</a:t>
+            </a:r>
+          </a:p>
+          <a:p>
+            <a:pPr marL="285750" indent="-285750">
+              <a:buFont typeface="Arial" panose="020B0604020202020204" pitchFamily="34" charset="0"/>
+              <a:buChar char="•"/>
+            </a:pPr>
+            <a:r>
+              <a:rPr lang="en-US" b="1" dirty="0">
+                <a:solidFill>
+                  <a:srgbClr val="667085"/>
+                </a:solidFill>
+              </a:rPr>
+              <a:t>Project Repository: </a:t>
+            </a:r>
+            <a:r>
+              <a:rPr lang="en-US" dirty="0">
+                <a:solidFill>
+                  <a:srgbClr val="667085"/>
+                </a:solidFill>
+              </a:rPr>
+              <a:t>https://github.com/justaguy1337/mlops.git</a:t>
             </a:r>
             <a:endParaRPr lang="en-US" sz="1800" dirty="0"/>
           </a:p>
@@ -3735,7 +7605,7 @@
           </a:prstGeom>
           <a:extLst>
             <a:ext uri="{C572A759-6A51-4108-AA02-DFA0A04FC94B}">
-              <ma14:wrappingTextBoxFlag xmlns:ma14="http://schemas.microsoft.com/office/mac/drawingml/2011/main" xmlns="" val="0"/>
+              <ma14:wrappingTextBoxFlag xmlns="" xmlns:ma14="http://schemas.microsoft.com/office/mac/drawingml/2011/main" val="0"/>
             </a:ext>
           </a:extLst>
         </p:spPr>
@@ -3960,7 +7830,7 @@
           </a:prstGeom>
           <a:extLst>
             <a:ext uri="{C572A759-6A51-4108-AA02-DFA0A04FC94B}">
-              <ma14:wrappingTextBoxFlag xmlns:ma14="http://schemas.microsoft.com/office/mac/drawingml/2011/main" xmlns="" val="0"/>
+              <ma14:wrappingTextBoxFlag xmlns="" xmlns:ma14="http://schemas.microsoft.com/office/mac/drawingml/2011/main" val="0"/>
             </a:ext>
           </a:extLst>
         </p:spPr>
@@ -4298,7 +8168,7 @@
           </a:xfrm>
           <a:extLst>
             <a:ext uri="{C572A759-6A51-4108-AA02-DFA0A04FC94B}">
-              <ma14:wrappingTextBoxFlag xmlns:ma14="http://schemas.microsoft.com/office/mac/drawingml/2011/main" xmlns="" val="0"/>
+              <ma14:wrappingTextBoxFlag xmlns="" xmlns:ma14="http://schemas.microsoft.com/office/mac/drawingml/2011/main" val="0"/>
             </a:ext>
           </a:extLst>
         </p:spPr>
@@ -4671,7 +8541,7 @@
           </a:prstGeom>
           <a:extLst>
             <a:ext uri="{C572A759-6A51-4108-AA02-DFA0A04FC94B}">
-              <ma14:wrappingTextBoxFlag xmlns:ma14="http://schemas.microsoft.com/office/mac/drawingml/2011/main" xmlns="" val="0"/>
+              <ma14:wrappingTextBoxFlag xmlns="" xmlns:ma14="http://schemas.microsoft.com/office/mac/drawingml/2011/main" val="0"/>
             </a:ext>
           </a:extLst>
         </p:spPr>
@@ -4855,7 +8725,7 @@
           </a:prstGeom>
           <a:extLst>
             <a:ext uri="{C572A759-6A51-4108-AA02-DFA0A04FC94B}">
-              <ma14:wrappingTextBoxFlag xmlns:ma14="http://schemas.microsoft.com/office/mac/drawingml/2011/main" xmlns="" val="0"/>
+              <ma14:wrappingTextBoxFlag xmlns="" xmlns:ma14="http://schemas.microsoft.com/office/mac/drawingml/2011/main" val="0"/>
             </a:ext>
           </a:extLst>
         </p:spPr>
@@ -7968,7 +11838,7 @@
           </a:prstGeom>
           <a:extLst>
             <a:ext uri="{C572A759-6A51-4108-AA02-DFA0A04FC94B}">
-              <ma14:wrappingTextBoxFlag xmlns:ma14="http://schemas.microsoft.com/office/mac/drawingml/2011/main" xmlns="" val="0"/>
+              <ma14:wrappingTextBoxFlag xmlns="" xmlns:ma14="http://schemas.microsoft.com/office/mac/drawingml/2011/main" val="0"/>
             </a:ext>
           </a:extLst>
         </p:spPr>
@@ -8325,7 +12195,7 @@
           </a:prstGeom>
           <a:extLst>
             <a:ext uri="{C572A759-6A51-4108-AA02-DFA0A04FC94B}">
-              <ma14:wrappingTextBoxFlag xmlns:ma14="http://schemas.microsoft.com/office/mac/drawingml/2011/main" xmlns="" val="0"/>
+              <ma14:wrappingTextBoxFlag xmlns="" xmlns:ma14="http://schemas.microsoft.com/office/mac/drawingml/2011/main" val="0"/>
             </a:ext>
           </a:extLst>
         </p:spPr>
@@ -8481,7 +12351,7 @@
           </a:prstGeom>
           <a:extLst>
             <a:ext uri="{C572A759-6A51-4108-AA02-DFA0A04FC94B}">
-              <ma14:wrappingTextBoxFlag xmlns:ma14="http://schemas.microsoft.com/office/mac/drawingml/2011/main" xmlns="" val="0"/>
+              <ma14:wrappingTextBoxFlag xmlns="" xmlns:ma14="http://schemas.microsoft.com/office/mac/drawingml/2011/main" val="0"/>
             </a:ext>
           </a:extLst>
         </p:spPr>
@@ -11414,7 +15284,7 @@
           </a:prstGeom>
           <a:extLst>
             <a:ext uri="{C572A759-6A51-4108-AA02-DFA0A04FC94B}">
-              <ma14:wrappingTextBoxFlag xmlns:ma14="http://schemas.microsoft.com/office/mac/drawingml/2011/main" xmlns="" val="0"/>
+              <ma14:wrappingTextBoxFlag xmlns="" xmlns:ma14="http://schemas.microsoft.com/office/mac/drawingml/2011/main" val="0"/>
             </a:ext>
           </a:extLst>
         </p:spPr>
@@ -11525,69 +15395,6 @@
       </p:sp>
       <p:sp>
         <p:nvSpPr>
-          <p:cNvPr id="4" name="Shape 2"/>
-          <p:cNvSpPr/>
-          <p:nvPr/>
-        </p:nvSpPr>
-        <p:spPr>
-          <a:xfrm>
-            <a:off x="777240" y="1600200"/>
-            <a:ext cx="10652760" cy="4251960"/>
-          </a:xfrm>
-          <a:prstGeom prst="roundRect">
-            <a:avLst>
-              <a:gd name="adj" fmla="val 1290"/>
-            </a:avLst>
-          </a:prstGeom>
-          <a:solidFill>
-            <a:srgbClr val="FFFFFF"/>
-          </a:solidFill>
-          <a:ln w="15240">
-            <a:solidFill>
-              <a:srgbClr val="D9DEE5"/>
-            </a:solidFill>
-            <a:prstDash val="solid"/>
-          </a:ln>
-        </p:spPr>
-      </p:sp>
-      <p:sp>
-        <p:nvSpPr>
-          <p:cNvPr id="5" name="Text 3"/>
-          <p:cNvSpPr/>
-          <p:nvPr/>
-        </p:nvSpPr>
-        <p:spPr>
-          <a:xfrm>
-            <a:off x="1051560" y="1920240"/>
-            <a:ext cx="10058400" cy="3611880"/>
-          </a:xfrm>
-          <a:prstGeom prst="rect">
-            <a:avLst/>
-          </a:prstGeom>
-          <a:noFill/>
-          <a:ln/>
-        </p:spPr>
-        <p:txBody>
-          <a:bodyPr wrap="square" lIns="635" tIns="635" rIns="635" bIns="635" rtlCol="0" anchor="ctr"/>
-          <a:lstStyle/>
-          <a:p>
-            <a:pPr marL="0" indent="0" algn="ctr">
-              <a:buNone/>
-            </a:pPr>
-            <a:r>
-              <a:rPr lang="en-US" sz="1800" dirty="0">
-                <a:solidFill>
-                  <a:srgbClr val="667085"/>
-                </a:solidFill>
-              </a:rPr>
-              <a:t>Insert screenshots of at least five meaningful views: revenue trends, top products, segmentation, country-wise sales, retention/repeat purchase.</a:t>
-            </a:r>
-            <a:endParaRPr lang="en-US" sz="1800" dirty="0"/>
-          </a:p>
-        </p:txBody>
-      </p:sp>
-      <p:sp>
-        <p:nvSpPr>
           <p:cNvPr id="25" name="Slide Number Placeholder 0"/>
           <p:cNvSpPr>
             <a:spLocks noGrp="1"/>
@@ -11606,7 +15413,7 @@
           </a:prstGeom>
           <a:extLst>
             <a:ext uri="{C572A759-6A51-4108-AA02-DFA0A04FC94B}">
-              <ma14:wrappingTextBoxFlag xmlns:ma14="http://schemas.microsoft.com/office/mac/drawingml/2011/main" xmlns="" val="0"/>
+              <ma14:wrappingTextBoxFlag xmlns="" xmlns:ma14="http://schemas.microsoft.com/office/mac/drawingml/2011/main" val="0"/>
             </a:ext>
           </a:extLst>
         </p:spPr>
@@ -11628,6 +15435,201 @@
               <a:t>9</a:t>
             </a:fld>
             <a:endParaRPr lang="en-US"/>
+          </a:p>
+        </p:txBody>
+      </p:sp>
+      <p:pic>
+        <p:nvPicPr>
+          <p:cNvPr id="57" name="Picture 56">
+            <a:extLst>
+              <a:ext uri="{FF2B5EF4-FFF2-40B4-BE49-F238E27FC236}">
+                <a16:creationId xmlns:a16="http://schemas.microsoft.com/office/drawing/2014/main" id="{ACB5F3B4-ED87-B00B-E214-73C51FE9151D}"/>
+              </a:ext>
+            </a:extLst>
+          </p:cNvPr>
+          <p:cNvPicPr>
+            <a:picLocks noChangeAspect="1"/>
+          </p:cNvPicPr>
+          <p:nvPr/>
+        </p:nvPicPr>
+        <p:blipFill>
+          <a:blip r:embed="rId3"/>
+          <a:stretch>
+            <a:fillRect/>
+          </a:stretch>
+        </p:blipFill>
+        <p:spPr>
+          <a:xfrm>
+            <a:off x="574126" y="1515275"/>
+            <a:ext cx="11008858" cy="3901559"/>
+          </a:xfrm>
+          <a:prstGeom prst="rect">
+            <a:avLst/>
+          </a:prstGeom>
+          <a:effectLst>
+            <a:softEdge rad="139700"/>
+          </a:effectLst>
+        </p:spPr>
+      </p:pic>
+      <p:sp>
+        <p:nvSpPr>
+          <p:cNvPr id="58" name="Text 56">
+            <a:extLst>
+              <a:ext uri="{FF2B5EF4-FFF2-40B4-BE49-F238E27FC236}">
+                <a16:creationId xmlns:a16="http://schemas.microsoft.com/office/drawing/2014/main" id="{2BDF037E-1929-2BF5-C087-323C72CC2313}"/>
+              </a:ext>
+            </a:extLst>
+          </p:cNvPr>
+          <p:cNvSpPr/>
+          <p:nvPr/>
+        </p:nvSpPr>
+        <p:spPr>
+          <a:xfrm>
+            <a:off x="640080" y="5559552"/>
+            <a:ext cx="10972800" cy="1280160"/>
+          </a:xfrm>
+          <a:prstGeom prst="rect">
+            <a:avLst/>
+          </a:prstGeom>
+          <a:noFill/>
+          <a:ln/>
+        </p:spPr>
+        <p:txBody>
+          <a:bodyPr wrap="square" lIns="0" tIns="0" rIns="0" bIns="0" rtlCol="0" anchor="t"/>
+          <a:lstStyle>
+            <a:lvl1pPr marL="0" algn="l" defTabSz="914400" rtl="0" eaLnBrk="1" latinLnBrk="0" hangingPunct="1">
+              <a:defRPr sz="1800" kern="1200">
+                <a:solidFill>
+                  <a:schemeClr val="tx1"/>
+                </a:solidFill>
+                <a:latin typeface="+mn-lt"/>
+                <a:ea typeface="+mn-ea"/>
+                <a:cs typeface="+mn-cs"/>
+              </a:defRPr>
+            </a:lvl1pPr>
+            <a:lvl2pPr marL="457200" algn="l" defTabSz="914400" rtl="0" eaLnBrk="1" latinLnBrk="0" hangingPunct="1">
+              <a:defRPr sz="1800" kern="1200">
+                <a:solidFill>
+                  <a:schemeClr val="tx1"/>
+                </a:solidFill>
+                <a:latin typeface="+mn-lt"/>
+                <a:ea typeface="+mn-ea"/>
+                <a:cs typeface="+mn-cs"/>
+              </a:defRPr>
+            </a:lvl2pPr>
+            <a:lvl3pPr marL="914400" algn="l" defTabSz="914400" rtl="0" eaLnBrk="1" latinLnBrk="0" hangingPunct="1">
+              <a:defRPr sz="1800" kern="1200">
+                <a:solidFill>
+                  <a:schemeClr val="tx1"/>
+                </a:solidFill>
+                <a:latin typeface="+mn-lt"/>
+                <a:ea typeface="+mn-ea"/>
+                <a:cs typeface="+mn-cs"/>
+              </a:defRPr>
+            </a:lvl3pPr>
+            <a:lvl4pPr marL="1371600" algn="l" defTabSz="914400" rtl="0" eaLnBrk="1" latinLnBrk="0" hangingPunct="1">
+              <a:defRPr sz="1800" kern="1200">
+                <a:solidFill>
+                  <a:schemeClr val="tx1"/>
+                </a:solidFill>
+                <a:latin typeface="+mn-lt"/>
+                <a:ea typeface="+mn-ea"/>
+                <a:cs typeface="+mn-cs"/>
+              </a:defRPr>
+            </a:lvl4pPr>
+            <a:lvl5pPr marL="1828800" algn="l" defTabSz="914400" rtl="0" eaLnBrk="1" latinLnBrk="0" hangingPunct="1">
+              <a:defRPr sz="1800" kern="1200">
+                <a:solidFill>
+                  <a:schemeClr val="tx1"/>
+                </a:solidFill>
+                <a:latin typeface="+mn-lt"/>
+                <a:ea typeface="+mn-ea"/>
+                <a:cs typeface="+mn-cs"/>
+              </a:defRPr>
+            </a:lvl5pPr>
+            <a:lvl6pPr marL="2286000" algn="l" defTabSz="914400" rtl="0" eaLnBrk="1" latinLnBrk="0" hangingPunct="1">
+              <a:defRPr sz="1800" kern="1200">
+                <a:solidFill>
+                  <a:schemeClr val="tx1"/>
+                </a:solidFill>
+                <a:latin typeface="+mn-lt"/>
+                <a:ea typeface="+mn-ea"/>
+                <a:cs typeface="+mn-cs"/>
+              </a:defRPr>
+            </a:lvl6pPr>
+            <a:lvl7pPr marL="2743200" algn="l" defTabSz="914400" rtl="0" eaLnBrk="1" latinLnBrk="0" hangingPunct="1">
+              <a:defRPr sz="1800" kern="1200">
+                <a:solidFill>
+                  <a:schemeClr val="tx1"/>
+                </a:solidFill>
+                <a:latin typeface="+mn-lt"/>
+                <a:ea typeface="+mn-ea"/>
+                <a:cs typeface="+mn-cs"/>
+              </a:defRPr>
+            </a:lvl7pPr>
+            <a:lvl8pPr marL="3200400" algn="l" defTabSz="914400" rtl="0" eaLnBrk="1" latinLnBrk="0" hangingPunct="1">
+              <a:defRPr sz="1800" kern="1200">
+                <a:solidFill>
+                  <a:schemeClr val="tx1"/>
+                </a:solidFill>
+                <a:latin typeface="+mn-lt"/>
+                <a:ea typeface="+mn-ea"/>
+                <a:cs typeface="+mn-cs"/>
+              </a:defRPr>
+            </a:lvl8pPr>
+            <a:lvl9pPr marL="3657600" algn="l" defTabSz="914400" rtl="0" eaLnBrk="1" latinLnBrk="0" hangingPunct="1">
+              <a:defRPr sz="1800" kern="1200">
+                <a:solidFill>
+                  <a:schemeClr val="tx1"/>
+                </a:solidFill>
+                <a:latin typeface="+mn-lt"/>
+                <a:ea typeface="+mn-ea"/>
+                <a:cs typeface="+mn-cs"/>
+              </a:defRPr>
+            </a:lvl9pPr>
+          </a:lstStyle>
+          <a:p>
+            <a:pPr marL="228600" indent="-228600" algn="l">
+              <a:spcAft>
+                <a:spcPts val="600"/>
+              </a:spcAft>
+              <a:buSzPct val="100000"/>
+              <a:buChar char="•"/>
+            </a:pPr>
+            <a:r>
+              <a:rPr lang="en-US" sz="1250" dirty="0">
+                <a:solidFill>
+                  <a:srgbClr val="667084"/>
+                </a:solidFill>
+                <a:latin typeface="Arial" pitchFamily="34" charset="0"/>
+                <a:ea typeface="Arial" pitchFamily="34" charset="-122"/>
+                <a:cs typeface="Arial" pitchFamily="34" charset="-120"/>
+              </a:rPr>
+              <a:t>Streamlit dashboard connects directly to the </a:t>
+            </a:r>
+            <a:r>
+              <a:rPr lang="en-US" sz="1250" dirty="0" err="1">
+                <a:solidFill>
+                  <a:srgbClr val="667084"/>
+                </a:solidFill>
+                <a:latin typeface="Arial" pitchFamily="34" charset="0"/>
+                <a:ea typeface="Arial" pitchFamily="34" charset="-122"/>
+                <a:cs typeface="Arial" pitchFamily="34" charset="-120"/>
+              </a:rPr>
+              <a:t>Postgreas</a:t>
+            </a:r>
+            <a:r>
+              <a:rPr lang="en-US" sz="1250" dirty="0">
+                <a:solidFill>
+                  <a:srgbClr val="667084"/>
+                </a:solidFill>
+                <a:latin typeface="Arial" pitchFamily="34" charset="0"/>
+                <a:ea typeface="Arial" pitchFamily="34" charset="-122"/>
+                <a:cs typeface="Arial" pitchFamily="34" charset="-120"/>
+              </a:rPr>
+              <a:t> warehouse with sidebar filters for subject, school, and risk level.</a:t>
+            </a:r>
+            <a:endParaRPr lang="en-US" sz="1250" dirty="0"/>
           </a:p>
         </p:txBody>
       </p:sp>
